--- a/Analysis Report/analysis report.pptx
+++ b/Analysis Report/analysis report.pptx
@@ -10,9 +10,11 @@
     <p:sldId id="259" r:id="rId4"/>
     <p:sldId id="258" r:id="rId5"/>
     <p:sldId id="261" r:id="rId6"/>
-    <p:sldId id="260" r:id="rId7"/>
-    <p:sldId id="262" r:id="rId8"/>
-    <p:sldId id="263" r:id="rId9"/>
+    <p:sldId id="264" r:id="rId7"/>
+    <p:sldId id="260" r:id="rId8"/>
+    <p:sldId id="265" r:id="rId9"/>
+    <p:sldId id="262" r:id="rId10"/>
+    <p:sldId id="263" r:id="rId11"/>
   </p:sldIdLst>
   <p:sldSz cx="12192000" cy="6858000"/>
   <p:notesSz cx="6858000" cy="9144000"/>
@@ -111,6 +113,11 @@
       </a:defRPr>
     </a:lvl9pPr>
   </p:defaultTextStyle>
+  <p:extLst>
+    <p:ext uri="{EFAFB233-063F-42B5-8137-9DF3F51BA10A}">
+      <p15:sldGuideLst xmlns:p15="http://schemas.microsoft.com/office/powerpoint/2012/main"/>
+    </p:ext>
+  </p:extLst>
 </p:presentation>
 </file>
 
@@ -263,7 +270,7 @@
           <a:p>
             <a:fld id="{BC819FF3-4D90-4A46-9083-84D7E6FE98AE}" type="datetimeFigureOut">
               <a:rPr lang="en-IN" smtClean="0"/>
-              <a:t>04-05-2023</a:t>
+              <a:t>05-05-2023</a:t>
             </a:fld>
             <a:endParaRPr lang="en-IN"/>
           </a:p>
@@ -463,7 +470,7 @@
           <a:p>
             <a:fld id="{BC819FF3-4D90-4A46-9083-84D7E6FE98AE}" type="datetimeFigureOut">
               <a:rPr lang="en-IN" smtClean="0"/>
-              <a:t>04-05-2023</a:t>
+              <a:t>05-05-2023</a:t>
             </a:fld>
             <a:endParaRPr lang="en-IN"/>
           </a:p>
@@ -673,7 +680,7 @@
           <a:p>
             <a:fld id="{BC819FF3-4D90-4A46-9083-84D7E6FE98AE}" type="datetimeFigureOut">
               <a:rPr lang="en-IN" smtClean="0"/>
-              <a:t>04-05-2023</a:t>
+              <a:t>05-05-2023</a:t>
             </a:fld>
             <a:endParaRPr lang="en-IN"/>
           </a:p>
@@ -873,7 +880,7 @@
           <a:p>
             <a:fld id="{BC819FF3-4D90-4A46-9083-84D7E6FE98AE}" type="datetimeFigureOut">
               <a:rPr lang="en-IN" smtClean="0"/>
-              <a:t>04-05-2023</a:t>
+              <a:t>05-05-2023</a:t>
             </a:fld>
             <a:endParaRPr lang="en-IN"/>
           </a:p>
@@ -1149,7 +1156,7 @@
           <a:p>
             <a:fld id="{BC819FF3-4D90-4A46-9083-84D7E6FE98AE}" type="datetimeFigureOut">
               <a:rPr lang="en-IN" smtClean="0"/>
-              <a:t>04-05-2023</a:t>
+              <a:t>05-05-2023</a:t>
             </a:fld>
             <a:endParaRPr lang="en-IN"/>
           </a:p>
@@ -1417,7 +1424,7 @@
           <a:p>
             <a:fld id="{BC819FF3-4D90-4A46-9083-84D7E6FE98AE}" type="datetimeFigureOut">
               <a:rPr lang="en-IN" smtClean="0"/>
-              <a:t>04-05-2023</a:t>
+              <a:t>05-05-2023</a:t>
             </a:fld>
             <a:endParaRPr lang="en-IN"/>
           </a:p>
@@ -1832,7 +1839,7 @@
           <a:p>
             <a:fld id="{BC819FF3-4D90-4A46-9083-84D7E6FE98AE}" type="datetimeFigureOut">
               <a:rPr lang="en-IN" smtClean="0"/>
-              <a:t>04-05-2023</a:t>
+              <a:t>05-05-2023</a:t>
             </a:fld>
             <a:endParaRPr lang="en-IN"/>
           </a:p>
@@ -1974,7 +1981,7 @@
           <a:p>
             <a:fld id="{BC819FF3-4D90-4A46-9083-84D7E6FE98AE}" type="datetimeFigureOut">
               <a:rPr lang="en-IN" smtClean="0"/>
-              <a:t>04-05-2023</a:t>
+              <a:t>05-05-2023</a:t>
             </a:fld>
             <a:endParaRPr lang="en-IN"/>
           </a:p>
@@ -2087,7 +2094,7 @@
           <a:p>
             <a:fld id="{BC819FF3-4D90-4A46-9083-84D7E6FE98AE}" type="datetimeFigureOut">
               <a:rPr lang="en-IN" smtClean="0"/>
-              <a:t>04-05-2023</a:t>
+              <a:t>05-05-2023</a:t>
             </a:fld>
             <a:endParaRPr lang="en-IN"/>
           </a:p>
@@ -2400,7 +2407,7 @@
           <a:p>
             <a:fld id="{BC819FF3-4D90-4A46-9083-84D7E6FE98AE}" type="datetimeFigureOut">
               <a:rPr lang="en-IN" smtClean="0"/>
-              <a:t>04-05-2023</a:t>
+              <a:t>05-05-2023</a:t>
             </a:fld>
             <a:endParaRPr lang="en-IN"/>
           </a:p>
@@ -2689,7 +2696,7 @@
           <a:p>
             <a:fld id="{BC819FF3-4D90-4A46-9083-84D7E6FE98AE}" type="datetimeFigureOut">
               <a:rPr lang="en-IN" smtClean="0"/>
-              <a:t>04-05-2023</a:t>
+              <a:t>05-05-2023</a:t>
             </a:fld>
             <a:endParaRPr lang="en-IN"/>
           </a:p>
@@ -2932,7 +2939,7 @@
           <a:p>
             <a:fld id="{BC819FF3-4D90-4A46-9083-84D7E6FE98AE}" type="datetimeFigureOut">
               <a:rPr lang="en-IN" smtClean="0"/>
-              <a:t>04-05-2023</a:t>
+              <a:t>05-05-2023</a:t>
             </a:fld>
             <a:endParaRPr lang="en-IN"/>
           </a:p>
@@ -3504,18 +3511,186 @@
   <p:clrMapOvr>
     <a:masterClrMapping/>
   </p:clrMapOvr>
-  <mc:AlternateContent xmlns:mc="http://schemas.openxmlformats.org/markup-compatibility/2006">
-    <mc:Choice xmlns:p14="http://schemas.microsoft.com/office/powerpoint/2010/main" Requires="p14">
+  <mc:AlternateContent xmlns:mc="http://schemas.openxmlformats.org/markup-compatibility/2006" xmlns:p14="http://schemas.microsoft.com/office/powerpoint/2010/main">
+    <mc:Choice Requires="p14">
       <p:transition spd="slow" p14:dur="800">
         <p:circle/>
       </p:transition>
     </mc:Choice>
-    <mc:Fallback>
+    <mc:Fallback xmlns="">
       <p:transition spd="slow">
         <p:circle/>
       </p:transition>
     </mc:Fallback>
   </mc:AlternateContent>
+</p:sld>
+</file>
+
+<file path=ppt/slides/slide10.xml><?xml version="1.0" encoding="utf-8"?>
+<p:sld xmlns:a="http://schemas.openxmlformats.org/drawingml/2006/main" xmlns:r="http://schemas.openxmlformats.org/officeDocument/2006/relationships" xmlns:p="http://schemas.openxmlformats.org/presentationml/2006/main">
+  <p:cSld>
+    <p:spTree>
+      <p:nvGrpSpPr>
+        <p:cNvPr id="1" name=""/>
+        <p:cNvGrpSpPr/>
+        <p:nvPr/>
+      </p:nvGrpSpPr>
+      <p:grpSpPr>
+        <a:xfrm>
+          <a:off x="0" y="0"/>
+          <a:ext cx="0" cy="0"/>
+          <a:chOff x="0" y="0"/>
+          <a:chExt cx="0" cy="0"/>
+        </a:xfrm>
+      </p:grpSpPr>
+      <p:pic>
+        <p:nvPicPr>
+          <p:cNvPr id="2" name="Picture 1">
+            <a:extLst>
+              <a:ext uri="{FF2B5EF4-FFF2-40B4-BE49-F238E27FC236}">
+                <a16:creationId xmlns:a16="http://schemas.microsoft.com/office/drawing/2014/main" id="{BD741F70-5C03-C544-670B-E915E49F39E4}"/>
+              </a:ext>
+            </a:extLst>
+          </p:cNvPr>
+          <p:cNvPicPr>
+            <a:picLocks noChangeAspect="1"/>
+          </p:cNvPicPr>
+          <p:nvPr/>
+        </p:nvPicPr>
+        <p:blipFill rotWithShape="1">
+          <a:blip r:embed="rId2"/>
+          <a:srcRect l="18040" t="15174" r="17378" b="16187"/>
+          <a:stretch/>
+        </p:blipFill>
+        <p:spPr>
+          <a:xfrm>
+            <a:off x="11352346" y="100154"/>
+            <a:ext cx="642077" cy="682387"/>
+          </a:xfrm>
+          <a:prstGeom prst="rect">
+            <a:avLst/>
+          </a:prstGeom>
+        </p:spPr>
+      </p:pic>
+      <p:grpSp>
+        <p:nvGrpSpPr>
+          <p:cNvPr id="5" name="Group 4">
+            <a:extLst>
+              <a:ext uri="{FF2B5EF4-FFF2-40B4-BE49-F238E27FC236}">
+                <a16:creationId xmlns:a16="http://schemas.microsoft.com/office/drawing/2014/main" id="{0A41F1D5-4CD2-30F6-5607-C3927C188F55}"/>
+              </a:ext>
+            </a:extLst>
+          </p:cNvPr>
+          <p:cNvGrpSpPr/>
+          <p:nvPr/>
+        </p:nvGrpSpPr>
+        <p:grpSpPr>
+          <a:xfrm>
+            <a:off x="2438400" y="782541"/>
+            <a:ext cx="9753600" cy="6075458"/>
+            <a:chOff x="2438400" y="782541"/>
+            <a:chExt cx="9753600" cy="6075458"/>
+          </a:xfrm>
+        </p:grpSpPr>
+        <p:pic>
+          <p:nvPicPr>
+            <p:cNvPr id="3" name="Picture 2">
+              <a:extLst>
+                <a:ext uri="{FF2B5EF4-FFF2-40B4-BE49-F238E27FC236}">
+                  <a16:creationId xmlns:a16="http://schemas.microsoft.com/office/drawing/2014/main" id="{8BB81B18-F3C0-3D20-CE66-A84F773989D5}"/>
+                </a:ext>
+              </a:extLst>
+            </p:cNvPr>
+            <p:cNvPicPr>
+              <a:picLocks noChangeAspect="1"/>
+            </p:cNvPicPr>
+            <p:nvPr/>
+          </p:nvPicPr>
+          <p:blipFill>
+            <a:blip r:embed="rId3"/>
+            <a:stretch>
+              <a:fillRect/>
+            </a:stretch>
+          </p:blipFill>
+          <p:spPr>
+            <a:xfrm>
+              <a:off x="2438400" y="782541"/>
+              <a:ext cx="9753600" cy="5808474"/>
+            </a:xfrm>
+            <a:prstGeom prst="rect">
+              <a:avLst/>
+            </a:prstGeom>
+          </p:spPr>
+        </p:pic>
+        <p:sp>
+          <p:nvSpPr>
+            <p:cNvPr id="4" name="Rectangle 3">
+              <a:extLst>
+                <a:ext uri="{FF2B5EF4-FFF2-40B4-BE49-F238E27FC236}">
+                  <a16:creationId xmlns:a16="http://schemas.microsoft.com/office/drawing/2014/main" id="{C9E828F2-2862-DCDE-80CE-F6FEFDBC98CB}"/>
+                </a:ext>
+              </a:extLst>
+            </p:cNvPr>
+            <p:cNvSpPr/>
+            <p:nvPr/>
+          </p:nvSpPr>
+          <p:spPr>
+            <a:xfrm>
+              <a:off x="8461612" y="6075458"/>
+              <a:ext cx="3730388" cy="782541"/>
+            </a:xfrm>
+            <a:prstGeom prst="rect">
+              <a:avLst/>
+            </a:prstGeom>
+            <a:noFill/>
+            <a:ln>
+              <a:noFill/>
+            </a:ln>
+          </p:spPr>
+          <p:style>
+            <a:lnRef idx="2">
+              <a:schemeClr val="accent1">
+                <a:shade val="50000"/>
+              </a:schemeClr>
+            </a:lnRef>
+            <a:fillRef idx="1">
+              <a:schemeClr val="accent1"/>
+            </a:fillRef>
+            <a:effectRef idx="0">
+              <a:schemeClr val="accent1"/>
+            </a:effectRef>
+            <a:fontRef idx="minor">
+              <a:schemeClr val="lt1"/>
+            </a:fontRef>
+          </p:style>
+          <p:txBody>
+            <a:bodyPr rtlCol="0" anchor="ctr"/>
+            <a:lstStyle/>
+            <a:p>
+              <a:r>
+                <a:rPr lang="en-IN" sz="3200" b="1" dirty="0">
+                  <a:solidFill>
+                    <a:schemeClr val="accent1">
+                      <a:lumMod val="50000"/>
+                    </a:schemeClr>
+                  </a:solidFill>
+                </a:rPr>
+                <a:t>-by Dibyendu Biswas</a:t>
+              </a:r>
+            </a:p>
+          </p:txBody>
+        </p:sp>
+      </p:grpSp>
+    </p:spTree>
+    <p:extLst>
+      <p:ext uri="{BB962C8B-B14F-4D97-AF65-F5344CB8AC3E}">
+        <p14:creationId xmlns:p14="http://schemas.microsoft.com/office/powerpoint/2010/main" val="2149262193"/>
+      </p:ext>
+    </p:extLst>
+  </p:cSld>
+  <p:clrMapOvr>
+    <a:masterClrMapping/>
+  </p:clrMapOvr>
 </p:sld>
 </file>
 
@@ -3678,7 +3853,7 @@
         </p:nvGrpSpPr>
         <p:grpSpPr>
           <a:xfrm>
-            <a:off x="650543" y="2561678"/>
+            <a:off x="650543" y="1569855"/>
             <a:ext cx="5773005" cy="1027890"/>
             <a:chOff x="650543" y="1833625"/>
             <a:chExt cx="5773005" cy="1027890"/>
@@ -4191,6 +4366,1514 @@
           </a:p>
         </p:txBody>
       </p:sp>
+      <p:grpSp>
+        <p:nvGrpSpPr>
+          <p:cNvPr id="39" name="Group 38">
+            <a:extLst>
+              <a:ext uri="{FF2B5EF4-FFF2-40B4-BE49-F238E27FC236}">
+                <a16:creationId xmlns:a16="http://schemas.microsoft.com/office/drawing/2014/main" id="{09039705-BA1C-4EE5-8B5F-701EE28155AE}"/>
+              </a:ext>
+            </a:extLst>
+          </p:cNvPr>
+          <p:cNvGrpSpPr/>
+          <p:nvPr/>
+        </p:nvGrpSpPr>
+        <p:grpSpPr>
+          <a:xfrm>
+            <a:off x="707563" y="3308644"/>
+            <a:ext cx="3883356" cy="3017091"/>
+            <a:chOff x="650543" y="3308644"/>
+            <a:chExt cx="3883356" cy="3017091"/>
+          </a:xfrm>
+        </p:grpSpPr>
+        <p:grpSp>
+          <p:nvGrpSpPr>
+            <p:cNvPr id="32" name="Group 31">
+              <a:extLst>
+                <a:ext uri="{FF2B5EF4-FFF2-40B4-BE49-F238E27FC236}">
+                  <a16:creationId xmlns:a16="http://schemas.microsoft.com/office/drawing/2014/main" id="{81292314-8FB0-DF6B-9D8B-CEB7F30B2187}"/>
+                </a:ext>
+              </a:extLst>
+            </p:cNvPr>
+            <p:cNvGrpSpPr/>
+            <p:nvPr/>
+          </p:nvGrpSpPr>
+          <p:grpSpPr>
+            <a:xfrm>
+              <a:off x="650543" y="3308644"/>
+              <a:ext cx="2021006" cy="3017091"/>
+              <a:chOff x="1009932" y="3190338"/>
+              <a:chExt cx="2021006" cy="3017091"/>
+            </a:xfrm>
+          </p:grpSpPr>
+          <p:grpSp>
+            <p:nvGrpSpPr>
+              <p:cNvPr id="30" name="Group 29">
+                <a:extLst>
+                  <a:ext uri="{FF2B5EF4-FFF2-40B4-BE49-F238E27FC236}">
+                    <a16:creationId xmlns:a16="http://schemas.microsoft.com/office/drawing/2014/main" id="{00C1200C-E241-DC7C-1B34-D68EBBA8DB9F}"/>
+                  </a:ext>
+                </a:extLst>
+              </p:cNvPr>
+              <p:cNvGrpSpPr/>
+              <p:nvPr/>
+            </p:nvGrpSpPr>
+            <p:grpSpPr>
+              <a:xfrm>
+                <a:off x="1009932" y="3193575"/>
+                <a:ext cx="764277" cy="3010359"/>
+                <a:chOff x="1009932" y="3193575"/>
+                <a:chExt cx="764277" cy="3010359"/>
+              </a:xfrm>
+            </p:grpSpPr>
+            <p:grpSp>
+              <p:nvGrpSpPr>
+                <p:cNvPr id="28" name="Group 27">
+                  <a:extLst>
+                    <a:ext uri="{FF2B5EF4-FFF2-40B4-BE49-F238E27FC236}">
+                      <a16:creationId xmlns:a16="http://schemas.microsoft.com/office/drawing/2014/main" id="{B50739E7-91D5-06AE-8F85-BE6E1616328E}"/>
+                    </a:ext>
+                  </a:extLst>
+                </p:cNvPr>
+                <p:cNvGrpSpPr/>
+                <p:nvPr/>
+              </p:nvGrpSpPr>
+              <p:grpSpPr>
+                <a:xfrm>
+                  <a:off x="1009932" y="3193575"/>
+                  <a:ext cx="764277" cy="2743201"/>
+                  <a:chOff x="1009932" y="3193575"/>
+                  <a:chExt cx="764277" cy="2743201"/>
+                </a:xfrm>
+              </p:grpSpPr>
+              <p:grpSp>
+                <p:nvGrpSpPr>
+                  <p:cNvPr id="16" name="Group 15">
+                    <a:extLst>
+                      <a:ext uri="{FF2B5EF4-FFF2-40B4-BE49-F238E27FC236}">
+                        <a16:creationId xmlns:a16="http://schemas.microsoft.com/office/drawing/2014/main" id="{E1E78DBA-BFD5-68CA-179B-E33475E42694}"/>
+                      </a:ext>
+                    </a:extLst>
+                  </p:cNvPr>
+                  <p:cNvGrpSpPr/>
+                  <p:nvPr/>
+                </p:nvGrpSpPr>
+                <p:grpSpPr>
+                  <a:xfrm>
+                    <a:off x="1009933" y="3193576"/>
+                    <a:ext cx="764276" cy="2743200"/>
+                    <a:chOff x="1009933" y="3193576"/>
+                    <a:chExt cx="764276" cy="2743200"/>
+                  </a:xfrm>
+                </p:grpSpPr>
+                <p:sp>
+                  <p:nvSpPr>
+                    <p:cNvPr id="2" name="Rectangle 1">
+                      <a:extLst>
+                        <a:ext uri="{FF2B5EF4-FFF2-40B4-BE49-F238E27FC236}">
+                          <a16:creationId xmlns:a16="http://schemas.microsoft.com/office/drawing/2014/main" id="{B239A11D-5E29-208B-4D1C-5C639DAF59DF}"/>
+                        </a:ext>
+                      </a:extLst>
+                    </p:cNvPr>
+                    <p:cNvSpPr/>
+                    <p:nvPr/>
+                  </p:nvSpPr>
+                  <p:spPr>
+                    <a:xfrm>
+                      <a:off x="1009934" y="3193576"/>
+                      <a:ext cx="764275" cy="2743200"/>
+                    </a:xfrm>
+                    <a:prstGeom prst="rect">
+                      <a:avLst/>
+                    </a:prstGeom>
+                    <a:solidFill>
+                      <a:schemeClr val="accent4">
+                        <a:lumMod val="60000"/>
+                        <a:lumOff val="40000"/>
+                      </a:schemeClr>
+                    </a:solidFill>
+                    <a:ln>
+                      <a:noFill/>
+                    </a:ln>
+                  </p:spPr>
+                  <p:style>
+                    <a:lnRef idx="2">
+                      <a:schemeClr val="accent1">
+                        <a:shade val="50000"/>
+                      </a:schemeClr>
+                    </a:lnRef>
+                    <a:fillRef idx="1">
+                      <a:schemeClr val="accent1"/>
+                    </a:fillRef>
+                    <a:effectRef idx="0">
+                      <a:schemeClr val="accent1"/>
+                    </a:effectRef>
+                    <a:fontRef idx="minor">
+                      <a:schemeClr val="lt1"/>
+                    </a:fontRef>
+                  </p:style>
+                  <p:txBody>
+                    <a:bodyPr rtlCol="0" anchor="ctr"/>
+                    <a:lstStyle/>
+                    <a:p>
+                      <a:pPr algn="ctr"/>
+                      <a:endParaRPr lang="en-IN" dirty="0"/>
+                    </a:p>
+                  </p:txBody>
+                </p:sp>
+                <p:sp>
+                  <p:nvSpPr>
+                    <p:cNvPr id="14" name="Rectangle 13">
+                      <a:extLst>
+                        <a:ext uri="{FF2B5EF4-FFF2-40B4-BE49-F238E27FC236}">
+                          <a16:creationId xmlns:a16="http://schemas.microsoft.com/office/drawing/2014/main" id="{1535DD2C-CA74-6245-67DA-75E60F2EDA1D}"/>
+                        </a:ext>
+                      </a:extLst>
+                    </p:cNvPr>
+                    <p:cNvSpPr/>
+                    <p:nvPr/>
+                  </p:nvSpPr>
+                  <p:spPr>
+                    <a:xfrm>
+                      <a:off x="1009933" y="3193576"/>
+                      <a:ext cx="764275" cy="912126"/>
+                    </a:xfrm>
+                    <a:prstGeom prst="rect">
+                      <a:avLst/>
+                    </a:prstGeom>
+                    <a:solidFill>
+                      <a:srgbClr val="0000FF"/>
+                    </a:solidFill>
+                    <a:ln>
+                      <a:noFill/>
+                    </a:ln>
+                  </p:spPr>
+                  <p:style>
+                    <a:lnRef idx="2">
+                      <a:schemeClr val="accent1">
+                        <a:shade val="50000"/>
+                      </a:schemeClr>
+                    </a:lnRef>
+                    <a:fillRef idx="1">
+                      <a:schemeClr val="accent1"/>
+                    </a:fillRef>
+                    <a:effectRef idx="0">
+                      <a:schemeClr val="accent1"/>
+                    </a:effectRef>
+                    <a:fontRef idx="minor">
+                      <a:schemeClr val="lt1"/>
+                    </a:fontRef>
+                  </p:style>
+                  <p:txBody>
+                    <a:bodyPr rtlCol="0" anchor="ctr"/>
+                    <a:lstStyle/>
+                    <a:p>
+                      <a:pPr algn="ctr"/>
+                      <a:endParaRPr lang="en-IN"/>
+                    </a:p>
+                  </p:txBody>
+                </p:sp>
+              </p:grpSp>
+              <p:sp>
+                <p:nvSpPr>
+                  <p:cNvPr id="22" name="Rectangle 21">
+                    <a:extLst>
+                      <a:ext uri="{FF2B5EF4-FFF2-40B4-BE49-F238E27FC236}">
+                        <a16:creationId xmlns:a16="http://schemas.microsoft.com/office/drawing/2014/main" id="{E4CED7E8-24CB-8245-A12D-DCA446249DC0}"/>
+                      </a:ext>
+                    </a:extLst>
+                  </p:cNvPr>
+                  <p:cNvSpPr/>
+                  <p:nvPr/>
+                </p:nvSpPr>
+                <p:spPr>
+                  <a:xfrm>
+                    <a:off x="1009932" y="3193575"/>
+                    <a:ext cx="764275" cy="527541"/>
+                  </a:xfrm>
+                  <a:prstGeom prst="rect">
+                    <a:avLst/>
+                  </a:prstGeom>
+                  <a:noFill/>
+                  <a:ln>
+                    <a:noFill/>
+                  </a:ln>
+                </p:spPr>
+                <p:style>
+                  <a:lnRef idx="2">
+                    <a:schemeClr val="accent1">
+                      <a:shade val="50000"/>
+                    </a:schemeClr>
+                  </a:lnRef>
+                  <a:fillRef idx="1">
+                    <a:schemeClr val="accent1"/>
+                  </a:fillRef>
+                  <a:effectRef idx="0">
+                    <a:schemeClr val="accent1"/>
+                  </a:effectRef>
+                  <a:fontRef idx="minor">
+                    <a:schemeClr val="lt1"/>
+                  </a:fontRef>
+                </p:style>
+                <p:txBody>
+                  <a:bodyPr rtlCol="0" anchor="ctr"/>
+                  <a:lstStyle/>
+                  <a:p>
+                    <a:pPr algn="ctr"/>
+                    <a:r>
+                      <a:rPr lang="en-IN" dirty="0">
+                        <a:solidFill>
+                          <a:schemeClr val="bg1"/>
+                        </a:solidFill>
+                      </a:rPr>
+                      <a:t>23%</a:t>
+                    </a:r>
+                  </a:p>
+                </p:txBody>
+              </p:sp>
+              <p:sp>
+                <p:nvSpPr>
+                  <p:cNvPr id="23" name="Rectangle 22">
+                    <a:extLst>
+                      <a:ext uri="{FF2B5EF4-FFF2-40B4-BE49-F238E27FC236}">
+                        <a16:creationId xmlns:a16="http://schemas.microsoft.com/office/drawing/2014/main" id="{97255624-808B-C693-EBF2-B32C9B8170F8}"/>
+                      </a:ext>
+                    </a:extLst>
+                  </p:cNvPr>
+                  <p:cNvSpPr/>
+                  <p:nvPr/>
+                </p:nvSpPr>
+                <p:spPr>
+                  <a:xfrm>
+                    <a:off x="1009932" y="5409234"/>
+                    <a:ext cx="764275" cy="527541"/>
+                  </a:xfrm>
+                  <a:prstGeom prst="rect">
+                    <a:avLst/>
+                  </a:prstGeom>
+                  <a:noFill/>
+                  <a:ln>
+                    <a:noFill/>
+                  </a:ln>
+                </p:spPr>
+                <p:style>
+                  <a:lnRef idx="2">
+                    <a:schemeClr val="accent1">
+                      <a:shade val="50000"/>
+                    </a:schemeClr>
+                  </a:lnRef>
+                  <a:fillRef idx="1">
+                    <a:schemeClr val="accent1"/>
+                  </a:fillRef>
+                  <a:effectRef idx="0">
+                    <a:schemeClr val="accent1"/>
+                  </a:effectRef>
+                  <a:fontRef idx="minor">
+                    <a:schemeClr val="lt1"/>
+                  </a:fontRef>
+                </p:style>
+                <p:txBody>
+                  <a:bodyPr rtlCol="0" anchor="ctr"/>
+                  <a:lstStyle/>
+                  <a:p>
+                    <a:pPr algn="ctr"/>
+                    <a:r>
+                      <a:rPr lang="en-IN" dirty="0">
+                        <a:solidFill>
+                          <a:schemeClr val="tx1">
+                            <a:lumMod val="95000"/>
+                            <a:lumOff val="5000"/>
+                          </a:schemeClr>
+                        </a:solidFill>
+                      </a:rPr>
+                      <a:t>77%</a:t>
+                    </a:r>
+                  </a:p>
+                </p:txBody>
+              </p:sp>
+            </p:grpSp>
+            <p:sp>
+              <p:nvSpPr>
+                <p:cNvPr id="26" name="Rectangle 25">
+                  <a:extLst>
+                    <a:ext uri="{FF2B5EF4-FFF2-40B4-BE49-F238E27FC236}">
+                      <a16:creationId xmlns:a16="http://schemas.microsoft.com/office/drawing/2014/main" id="{F0ABF577-1241-B73F-FA27-6524DAAA39E2}"/>
+                    </a:ext>
+                  </a:extLst>
+                </p:cNvPr>
+                <p:cNvSpPr/>
+                <p:nvPr/>
+              </p:nvSpPr>
+              <p:spPr>
+                <a:xfrm>
+                  <a:off x="1009932" y="5884439"/>
+                  <a:ext cx="764275" cy="319495"/>
+                </a:xfrm>
+                <a:prstGeom prst="rect">
+                  <a:avLst/>
+                </a:prstGeom>
+                <a:noFill/>
+                <a:ln>
+                  <a:noFill/>
+                </a:ln>
+              </p:spPr>
+              <p:style>
+                <a:lnRef idx="2">
+                  <a:schemeClr val="accent1">
+                    <a:shade val="50000"/>
+                  </a:schemeClr>
+                </a:lnRef>
+                <a:fillRef idx="1">
+                  <a:schemeClr val="accent1"/>
+                </a:fillRef>
+                <a:effectRef idx="0">
+                  <a:schemeClr val="accent1"/>
+                </a:effectRef>
+                <a:fontRef idx="minor">
+                  <a:schemeClr val="lt1"/>
+                </a:fontRef>
+              </p:style>
+              <p:txBody>
+                <a:bodyPr rtlCol="0" anchor="ctr"/>
+                <a:lstStyle/>
+                <a:p>
+                  <a:pPr algn="ctr"/>
+                  <a:r>
+                    <a:rPr lang="en-IN" sz="1600" dirty="0">
+                      <a:solidFill>
+                        <a:schemeClr val="tx1">
+                          <a:lumMod val="95000"/>
+                          <a:lumOff val="5000"/>
+                        </a:schemeClr>
+                      </a:solidFill>
+                    </a:rPr>
+                    <a:t>Male</a:t>
+                  </a:r>
+                </a:p>
+              </p:txBody>
+            </p:sp>
+          </p:grpSp>
+          <p:grpSp>
+            <p:nvGrpSpPr>
+              <p:cNvPr id="31" name="Group 30">
+                <a:extLst>
+                  <a:ext uri="{FF2B5EF4-FFF2-40B4-BE49-F238E27FC236}">
+                    <a16:creationId xmlns:a16="http://schemas.microsoft.com/office/drawing/2014/main" id="{1D388735-0A56-7110-7279-A75DA9B93758}"/>
+                  </a:ext>
+                </a:extLst>
+              </p:cNvPr>
+              <p:cNvGrpSpPr/>
+              <p:nvPr/>
+            </p:nvGrpSpPr>
+            <p:grpSpPr>
+              <a:xfrm>
+                <a:off x="2132457" y="3190338"/>
+                <a:ext cx="898481" cy="3017091"/>
+                <a:chOff x="2132457" y="3190338"/>
+                <a:chExt cx="898481" cy="3017091"/>
+              </a:xfrm>
+            </p:grpSpPr>
+            <p:grpSp>
+              <p:nvGrpSpPr>
+                <p:cNvPr id="27" name="Group 26">
+                  <a:extLst>
+                    <a:ext uri="{FF2B5EF4-FFF2-40B4-BE49-F238E27FC236}">
+                      <a16:creationId xmlns:a16="http://schemas.microsoft.com/office/drawing/2014/main" id="{2DC90321-0B4D-8FAC-0290-5E7DEEED3C65}"/>
+                    </a:ext>
+                  </a:extLst>
+                </p:cNvPr>
+                <p:cNvGrpSpPr/>
+                <p:nvPr/>
+              </p:nvGrpSpPr>
+              <p:grpSpPr>
+                <a:xfrm>
+                  <a:off x="2199561" y="3190338"/>
+                  <a:ext cx="764277" cy="2746438"/>
+                  <a:chOff x="2199561" y="3190338"/>
+                  <a:chExt cx="764277" cy="2746438"/>
+                </a:xfrm>
+              </p:grpSpPr>
+              <p:grpSp>
+                <p:nvGrpSpPr>
+                  <p:cNvPr id="21" name="Group 20">
+                    <a:extLst>
+                      <a:ext uri="{FF2B5EF4-FFF2-40B4-BE49-F238E27FC236}">
+                        <a16:creationId xmlns:a16="http://schemas.microsoft.com/office/drawing/2014/main" id="{90879CD4-8CB2-F06A-DDBA-8AE7D5F8F42B}"/>
+                      </a:ext>
+                    </a:extLst>
+                  </p:cNvPr>
+                  <p:cNvGrpSpPr/>
+                  <p:nvPr/>
+                </p:nvGrpSpPr>
+                <p:grpSpPr>
+                  <a:xfrm>
+                    <a:off x="2199563" y="3193576"/>
+                    <a:ext cx="764275" cy="2743200"/>
+                    <a:chOff x="2226858" y="3193576"/>
+                    <a:chExt cx="764275" cy="2743200"/>
+                  </a:xfrm>
+                </p:grpSpPr>
+                <p:sp>
+                  <p:nvSpPr>
+                    <p:cNvPr id="13" name="Rectangle 12">
+                      <a:extLst>
+                        <a:ext uri="{FF2B5EF4-FFF2-40B4-BE49-F238E27FC236}">
+                          <a16:creationId xmlns:a16="http://schemas.microsoft.com/office/drawing/2014/main" id="{5001DD3B-8640-5E48-F387-71313FBEFA2E}"/>
+                        </a:ext>
+                      </a:extLst>
+                    </p:cNvPr>
+                    <p:cNvSpPr/>
+                    <p:nvPr/>
+                  </p:nvSpPr>
+                  <p:spPr>
+                    <a:xfrm>
+                      <a:off x="2226858" y="3193576"/>
+                      <a:ext cx="764275" cy="2743200"/>
+                    </a:xfrm>
+                    <a:prstGeom prst="rect">
+                      <a:avLst/>
+                    </a:prstGeom>
+                    <a:solidFill>
+                      <a:schemeClr val="accent4">
+                        <a:lumMod val="60000"/>
+                        <a:lumOff val="40000"/>
+                      </a:schemeClr>
+                    </a:solidFill>
+                    <a:ln>
+                      <a:noFill/>
+                    </a:ln>
+                  </p:spPr>
+                  <p:style>
+                    <a:lnRef idx="2">
+                      <a:schemeClr val="accent1">
+                        <a:shade val="50000"/>
+                      </a:schemeClr>
+                    </a:lnRef>
+                    <a:fillRef idx="1">
+                      <a:schemeClr val="accent1"/>
+                    </a:fillRef>
+                    <a:effectRef idx="0">
+                      <a:schemeClr val="accent1"/>
+                    </a:effectRef>
+                    <a:fontRef idx="minor">
+                      <a:schemeClr val="lt1"/>
+                    </a:fontRef>
+                  </p:style>
+                  <p:txBody>
+                    <a:bodyPr rtlCol="0" anchor="ctr"/>
+                    <a:lstStyle/>
+                    <a:p>
+                      <a:pPr algn="ctr"/>
+                      <a:endParaRPr lang="en-IN"/>
+                    </a:p>
+                  </p:txBody>
+                </p:sp>
+                <p:sp>
+                  <p:nvSpPr>
+                    <p:cNvPr id="15" name="Rectangle 14">
+                      <a:extLst>
+                        <a:ext uri="{FF2B5EF4-FFF2-40B4-BE49-F238E27FC236}">
+                          <a16:creationId xmlns:a16="http://schemas.microsoft.com/office/drawing/2014/main" id="{F89D76B7-315E-D8DB-8006-AF1042578331}"/>
+                        </a:ext>
+                      </a:extLst>
+                    </p:cNvPr>
+                    <p:cNvSpPr/>
+                    <p:nvPr/>
+                  </p:nvSpPr>
+                  <p:spPr>
+                    <a:xfrm>
+                      <a:off x="2226858" y="3193576"/>
+                      <a:ext cx="764275" cy="655093"/>
+                    </a:xfrm>
+                    <a:prstGeom prst="rect">
+                      <a:avLst/>
+                    </a:prstGeom>
+                    <a:solidFill>
+                      <a:srgbClr val="0000FF"/>
+                    </a:solidFill>
+                    <a:ln>
+                      <a:noFill/>
+                    </a:ln>
+                  </p:spPr>
+                  <p:style>
+                    <a:lnRef idx="2">
+                      <a:schemeClr val="accent1">
+                        <a:shade val="50000"/>
+                      </a:schemeClr>
+                    </a:lnRef>
+                    <a:fillRef idx="1">
+                      <a:schemeClr val="accent1"/>
+                    </a:fillRef>
+                    <a:effectRef idx="0">
+                      <a:schemeClr val="accent1"/>
+                    </a:effectRef>
+                    <a:fontRef idx="minor">
+                      <a:schemeClr val="lt1"/>
+                    </a:fontRef>
+                  </p:style>
+                  <p:txBody>
+                    <a:bodyPr rtlCol="0" anchor="ctr"/>
+                    <a:lstStyle/>
+                    <a:p>
+                      <a:pPr algn="ctr"/>
+                      <a:endParaRPr lang="en-IN"/>
+                    </a:p>
+                  </p:txBody>
+                </p:sp>
+              </p:grpSp>
+              <p:sp>
+                <p:nvSpPr>
+                  <p:cNvPr id="24" name="Rectangle 23">
+                    <a:extLst>
+                      <a:ext uri="{FF2B5EF4-FFF2-40B4-BE49-F238E27FC236}">
+                        <a16:creationId xmlns:a16="http://schemas.microsoft.com/office/drawing/2014/main" id="{B77CB2F2-5B6C-33CD-DE65-1FE4FCCC5A88}"/>
+                      </a:ext>
+                    </a:extLst>
+                  </p:cNvPr>
+                  <p:cNvSpPr/>
+                  <p:nvPr/>
+                </p:nvSpPr>
+                <p:spPr>
+                  <a:xfrm>
+                    <a:off x="2199561" y="5396636"/>
+                    <a:ext cx="764275" cy="527541"/>
+                  </a:xfrm>
+                  <a:prstGeom prst="rect">
+                    <a:avLst/>
+                  </a:prstGeom>
+                  <a:noFill/>
+                  <a:ln>
+                    <a:noFill/>
+                  </a:ln>
+                </p:spPr>
+                <p:style>
+                  <a:lnRef idx="2">
+                    <a:schemeClr val="accent1">
+                      <a:shade val="50000"/>
+                    </a:schemeClr>
+                  </a:lnRef>
+                  <a:fillRef idx="1">
+                    <a:schemeClr val="accent1"/>
+                  </a:fillRef>
+                  <a:effectRef idx="0">
+                    <a:schemeClr val="accent1"/>
+                  </a:effectRef>
+                  <a:fontRef idx="minor">
+                    <a:schemeClr val="lt1"/>
+                  </a:fontRef>
+                </p:style>
+                <p:txBody>
+                  <a:bodyPr rtlCol="0" anchor="ctr"/>
+                  <a:lstStyle/>
+                  <a:p>
+                    <a:pPr algn="ctr"/>
+                    <a:r>
+                      <a:rPr lang="en-IN" dirty="0">
+                        <a:solidFill>
+                          <a:schemeClr val="tx1">
+                            <a:lumMod val="95000"/>
+                            <a:lumOff val="5000"/>
+                          </a:schemeClr>
+                        </a:solidFill>
+                      </a:rPr>
+                      <a:t>83%</a:t>
+                    </a:r>
+                  </a:p>
+                </p:txBody>
+              </p:sp>
+              <p:sp>
+                <p:nvSpPr>
+                  <p:cNvPr id="25" name="Rectangle 24">
+                    <a:extLst>
+                      <a:ext uri="{FF2B5EF4-FFF2-40B4-BE49-F238E27FC236}">
+                        <a16:creationId xmlns:a16="http://schemas.microsoft.com/office/drawing/2014/main" id="{F0E0F67A-EE42-C42B-15A7-3EE89703B333}"/>
+                      </a:ext>
+                    </a:extLst>
+                  </p:cNvPr>
+                  <p:cNvSpPr/>
+                  <p:nvPr/>
+                </p:nvSpPr>
+                <p:spPr>
+                  <a:xfrm>
+                    <a:off x="2199561" y="3190338"/>
+                    <a:ext cx="764275" cy="527541"/>
+                  </a:xfrm>
+                  <a:prstGeom prst="rect">
+                    <a:avLst/>
+                  </a:prstGeom>
+                  <a:noFill/>
+                  <a:ln>
+                    <a:noFill/>
+                  </a:ln>
+                </p:spPr>
+                <p:style>
+                  <a:lnRef idx="2">
+                    <a:schemeClr val="accent1">
+                      <a:shade val="50000"/>
+                    </a:schemeClr>
+                  </a:lnRef>
+                  <a:fillRef idx="1">
+                    <a:schemeClr val="accent1"/>
+                  </a:fillRef>
+                  <a:effectRef idx="0">
+                    <a:schemeClr val="accent1"/>
+                  </a:effectRef>
+                  <a:fontRef idx="minor">
+                    <a:schemeClr val="lt1"/>
+                  </a:fontRef>
+                </p:style>
+                <p:txBody>
+                  <a:bodyPr rtlCol="0" anchor="ctr"/>
+                  <a:lstStyle/>
+                  <a:p>
+                    <a:pPr algn="ctr"/>
+                    <a:r>
+                      <a:rPr lang="en-IN" dirty="0">
+                        <a:solidFill>
+                          <a:schemeClr val="bg1"/>
+                        </a:solidFill>
+                      </a:rPr>
+                      <a:t>17%</a:t>
+                    </a:r>
+                  </a:p>
+                </p:txBody>
+              </p:sp>
+            </p:grpSp>
+            <p:sp>
+              <p:nvSpPr>
+                <p:cNvPr id="29" name="Rectangle 28">
+                  <a:extLst>
+                    <a:ext uri="{FF2B5EF4-FFF2-40B4-BE49-F238E27FC236}">
+                      <a16:creationId xmlns:a16="http://schemas.microsoft.com/office/drawing/2014/main" id="{ACB0BAFE-5ACB-238F-6E2B-3118FD8E7F7A}"/>
+                    </a:ext>
+                  </a:extLst>
+                </p:cNvPr>
+                <p:cNvSpPr/>
+                <p:nvPr/>
+              </p:nvSpPr>
+              <p:spPr>
+                <a:xfrm>
+                  <a:off x="2132457" y="5891266"/>
+                  <a:ext cx="898481" cy="316163"/>
+                </a:xfrm>
+                <a:prstGeom prst="rect">
+                  <a:avLst/>
+                </a:prstGeom>
+                <a:noFill/>
+                <a:ln>
+                  <a:noFill/>
+                </a:ln>
+              </p:spPr>
+              <p:style>
+                <a:lnRef idx="2">
+                  <a:schemeClr val="accent1">
+                    <a:shade val="50000"/>
+                  </a:schemeClr>
+                </a:lnRef>
+                <a:fillRef idx="1">
+                  <a:schemeClr val="accent1"/>
+                </a:fillRef>
+                <a:effectRef idx="0">
+                  <a:schemeClr val="accent1"/>
+                </a:effectRef>
+                <a:fontRef idx="minor">
+                  <a:schemeClr val="lt1"/>
+                </a:fontRef>
+              </p:style>
+              <p:txBody>
+                <a:bodyPr rtlCol="0" anchor="ctr"/>
+                <a:lstStyle/>
+                <a:p>
+                  <a:pPr algn="ctr"/>
+                  <a:r>
+                    <a:rPr lang="en-IN" sz="1600" dirty="0">
+                      <a:solidFill>
+                        <a:schemeClr val="tx1">
+                          <a:lumMod val="95000"/>
+                          <a:lumOff val="5000"/>
+                        </a:schemeClr>
+                      </a:solidFill>
+                    </a:rPr>
+                    <a:t>Female</a:t>
+                  </a:r>
+                </a:p>
+              </p:txBody>
+            </p:sp>
+          </p:grpSp>
+        </p:grpSp>
+        <p:grpSp>
+          <p:nvGrpSpPr>
+            <p:cNvPr id="38" name="Group 37">
+              <a:extLst>
+                <a:ext uri="{FF2B5EF4-FFF2-40B4-BE49-F238E27FC236}">
+                  <a16:creationId xmlns:a16="http://schemas.microsoft.com/office/drawing/2014/main" id="{E96BB2D7-4A64-094C-E2C5-18A9B42FF8C5}"/>
+                </a:ext>
+              </a:extLst>
+            </p:cNvPr>
+            <p:cNvGrpSpPr/>
+            <p:nvPr/>
+          </p:nvGrpSpPr>
+          <p:grpSpPr>
+            <a:xfrm>
+              <a:off x="2861428" y="3327823"/>
+              <a:ext cx="1672471" cy="676100"/>
+              <a:chOff x="2861428" y="3327823"/>
+              <a:chExt cx="1672471" cy="676100"/>
+            </a:xfrm>
+          </p:grpSpPr>
+          <p:grpSp>
+            <p:nvGrpSpPr>
+              <p:cNvPr id="35" name="Group 34">
+                <a:extLst>
+                  <a:ext uri="{FF2B5EF4-FFF2-40B4-BE49-F238E27FC236}">
+                    <a16:creationId xmlns:a16="http://schemas.microsoft.com/office/drawing/2014/main" id="{EB434E28-E984-9139-2B00-A90B04A60E3D}"/>
+                  </a:ext>
+                </a:extLst>
+              </p:cNvPr>
+              <p:cNvGrpSpPr/>
+              <p:nvPr/>
+            </p:nvGrpSpPr>
+            <p:grpSpPr>
+              <a:xfrm>
+                <a:off x="2861428" y="3401720"/>
+                <a:ext cx="168371" cy="565255"/>
+                <a:chOff x="2861428" y="3401720"/>
+                <a:chExt cx="168371" cy="565255"/>
+              </a:xfrm>
+            </p:grpSpPr>
+            <p:sp>
+              <p:nvSpPr>
+                <p:cNvPr id="33" name="Oval 32">
+                  <a:extLst>
+                    <a:ext uri="{FF2B5EF4-FFF2-40B4-BE49-F238E27FC236}">
+                      <a16:creationId xmlns:a16="http://schemas.microsoft.com/office/drawing/2014/main" id="{7328B044-1E9E-A502-8F65-F425C1A51FE1}"/>
+                    </a:ext>
+                  </a:extLst>
+                </p:cNvPr>
+                <p:cNvSpPr/>
+                <p:nvPr/>
+              </p:nvSpPr>
+              <p:spPr>
+                <a:xfrm>
+                  <a:off x="2861428" y="3401720"/>
+                  <a:ext cx="168370" cy="168370"/>
+                </a:xfrm>
+                <a:prstGeom prst="ellipse">
+                  <a:avLst/>
+                </a:prstGeom>
+                <a:solidFill>
+                  <a:srgbClr val="0000FF"/>
+                </a:solidFill>
+                <a:ln>
+                  <a:noFill/>
+                </a:ln>
+              </p:spPr>
+              <p:style>
+                <a:lnRef idx="2">
+                  <a:schemeClr val="accent1">
+                    <a:shade val="50000"/>
+                  </a:schemeClr>
+                </a:lnRef>
+                <a:fillRef idx="1">
+                  <a:schemeClr val="accent1"/>
+                </a:fillRef>
+                <a:effectRef idx="0">
+                  <a:schemeClr val="accent1"/>
+                </a:effectRef>
+                <a:fontRef idx="minor">
+                  <a:schemeClr val="lt1"/>
+                </a:fontRef>
+              </p:style>
+              <p:txBody>
+                <a:bodyPr rtlCol="0" anchor="ctr"/>
+                <a:lstStyle/>
+                <a:p>
+                  <a:pPr algn="ctr"/>
+                  <a:endParaRPr lang="en-IN"/>
+                </a:p>
+              </p:txBody>
+            </p:sp>
+            <p:sp>
+              <p:nvSpPr>
+                <p:cNvPr id="34" name="Oval 33">
+                  <a:extLst>
+                    <a:ext uri="{FF2B5EF4-FFF2-40B4-BE49-F238E27FC236}">
+                      <a16:creationId xmlns:a16="http://schemas.microsoft.com/office/drawing/2014/main" id="{D74E28B3-9A9D-836D-FF93-6210C7F84EC5}"/>
+                    </a:ext>
+                  </a:extLst>
+                </p:cNvPr>
+                <p:cNvSpPr/>
+                <p:nvPr/>
+              </p:nvSpPr>
+              <p:spPr>
+                <a:xfrm>
+                  <a:off x="2861429" y="3798605"/>
+                  <a:ext cx="168370" cy="168370"/>
+                </a:xfrm>
+                <a:prstGeom prst="ellipse">
+                  <a:avLst/>
+                </a:prstGeom>
+                <a:solidFill>
+                  <a:schemeClr val="accent4">
+                    <a:lumMod val="60000"/>
+                    <a:lumOff val="40000"/>
+                  </a:schemeClr>
+                </a:solidFill>
+                <a:ln>
+                  <a:noFill/>
+                </a:ln>
+              </p:spPr>
+              <p:style>
+                <a:lnRef idx="2">
+                  <a:schemeClr val="accent1">
+                    <a:shade val="50000"/>
+                  </a:schemeClr>
+                </a:lnRef>
+                <a:fillRef idx="1">
+                  <a:schemeClr val="accent1"/>
+                </a:fillRef>
+                <a:effectRef idx="0">
+                  <a:schemeClr val="accent1"/>
+                </a:effectRef>
+                <a:fontRef idx="minor">
+                  <a:schemeClr val="lt1"/>
+                </a:fontRef>
+              </p:style>
+              <p:txBody>
+                <a:bodyPr rtlCol="0" anchor="ctr"/>
+                <a:lstStyle/>
+                <a:p>
+                  <a:pPr algn="ctr"/>
+                  <a:endParaRPr lang="en-IN"/>
+                </a:p>
+              </p:txBody>
+            </p:sp>
+          </p:grpSp>
+          <p:sp>
+            <p:nvSpPr>
+              <p:cNvPr id="36" name="Rectangle 35">
+                <a:extLst>
+                  <a:ext uri="{FF2B5EF4-FFF2-40B4-BE49-F238E27FC236}">
+                    <a16:creationId xmlns:a16="http://schemas.microsoft.com/office/drawing/2014/main" id="{D193B2B8-5307-A900-1249-F8E968743D95}"/>
+                  </a:ext>
+                </a:extLst>
+              </p:cNvPr>
+              <p:cNvSpPr/>
+              <p:nvPr/>
+            </p:nvSpPr>
+            <p:spPr>
+              <a:xfrm>
+                <a:off x="3078962" y="3327823"/>
+                <a:ext cx="1011640" cy="242267"/>
+              </a:xfrm>
+              <a:prstGeom prst="rect">
+                <a:avLst/>
+              </a:prstGeom>
+              <a:noFill/>
+              <a:ln>
+                <a:noFill/>
+              </a:ln>
+            </p:spPr>
+            <p:style>
+              <a:lnRef idx="2">
+                <a:schemeClr val="accent1">
+                  <a:shade val="50000"/>
+                </a:schemeClr>
+              </a:lnRef>
+              <a:fillRef idx="1">
+                <a:schemeClr val="accent1"/>
+              </a:fillRef>
+              <a:effectRef idx="0">
+                <a:schemeClr val="accent1"/>
+              </a:effectRef>
+              <a:fontRef idx="minor">
+                <a:schemeClr val="lt1"/>
+              </a:fontRef>
+            </p:style>
+            <p:txBody>
+              <a:bodyPr rtlCol="0" anchor="ctr"/>
+              <a:lstStyle/>
+              <a:p>
+                <a:r>
+                  <a:rPr lang="en-US" sz="1600" dirty="0">
+                    <a:solidFill>
+                      <a:schemeClr val="tx1">
+                        <a:lumMod val="95000"/>
+                        <a:lumOff val="5000"/>
+                      </a:schemeClr>
+                    </a:solidFill>
+                  </a:rPr>
+                  <a:t>S</a:t>
+                </a:r>
+                <a:r>
+                  <a:rPr lang="en-IN" sz="1600" dirty="0">
+                    <a:solidFill>
+                      <a:schemeClr val="tx1">
+                        <a:lumMod val="95000"/>
+                        <a:lumOff val="5000"/>
+                      </a:schemeClr>
+                    </a:solidFill>
+                  </a:rPr>
+                  <a:t>moker</a:t>
+                </a:r>
+              </a:p>
+            </p:txBody>
+          </p:sp>
+          <p:sp>
+            <p:nvSpPr>
+              <p:cNvPr id="37" name="Rectangle 36">
+                <a:extLst>
+                  <a:ext uri="{FF2B5EF4-FFF2-40B4-BE49-F238E27FC236}">
+                    <a16:creationId xmlns:a16="http://schemas.microsoft.com/office/drawing/2014/main" id="{72232B6C-1A62-C181-6181-14647839C4F1}"/>
+                  </a:ext>
+                </a:extLst>
+              </p:cNvPr>
+              <p:cNvSpPr/>
+              <p:nvPr/>
+            </p:nvSpPr>
+            <p:spPr>
+              <a:xfrm>
+                <a:off x="3078962" y="3761656"/>
+                <a:ext cx="1454937" cy="242267"/>
+              </a:xfrm>
+              <a:prstGeom prst="rect">
+                <a:avLst/>
+              </a:prstGeom>
+              <a:noFill/>
+              <a:ln>
+                <a:noFill/>
+              </a:ln>
+            </p:spPr>
+            <p:style>
+              <a:lnRef idx="2">
+                <a:schemeClr val="accent1">
+                  <a:shade val="50000"/>
+                </a:schemeClr>
+              </a:lnRef>
+              <a:fillRef idx="1">
+                <a:schemeClr val="accent1"/>
+              </a:fillRef>
+              <a:effectRef idx="0">
+                <a:schemeClr val="accent1"/>
+              </a:effectRef>
+              <a:fontRef idx="minor">
+                <a:schemeClr val="lt1"/>
+              </a:fontRef>
+            </p:style>
+            <p:txBody>
+              <a:bodyPr rtlCol="0" anchor="ctr"/>
+              <a:lstStyle/>
+              <a:p>
+                <a:r>
+                  <a:rPr lang="en-US" sz="1600" dirty="0">
+                    <a:solidFill>
+                      <a:schemeClr val="tx1">
+                        <a:lumMod val="95000"/>
+                        <a:lumOff val="5000"/>
+                      </a:schemeClr>
+                    </a:solidFill>
+                  </a:rPr>
+                  <a:t>Non-S</a:t>
+                </a:r>
+                <a:r>
+                  <a:rPr lang="en-IN" sz="1600" dirty="0">
+                    <a:solidFill>
+                      <a:schemeClr val="tx1">
+                        <a:lumMod val="95000"/>
+                        <a:lumOff val="5000"/>
+                      </a:schemeClr>
+                    </a:solidFill>
+                  </a:rPr>
+                  <a:t>moker</a:t>
+                </a:r>
+              </a:p>
+            </p:txBody>
+          </p:sp>
+        </p:grpSp>
+      </p:grpSp>
+      <p:grpSp>
+        <p:nvGrpSpPr>
+          <p:cNvPr id="48" name="Group 47">
+            <a:extLst>
+              <a:ext uri="{FF2B5EF4-FFF2-40B4-BE49-F238E27FC236}">
+                <a16:creationId xmlns:a16="http://schemas.microsoft.com/office/drawing/2014/main" id="{59279756-3212-08D5-767F-53BA1FAD0043}"/>
+              </a:ext>
+            </a:extLst>
+          </p:cNvPr>
+          <p:cNvGrpSpPr/>
+          <p:nvPr/>
+        </p:nvGrpSpPr>
+        <p:grpSpPr>
+          <a:xfrm>
+            <a:off x="6685125" y="3400910"/>
+            <a:ext cx="2322397" cy="527541"/>
+            <a:chOff x="3204936" y="4847260"/>
+            <a:chExt cx="3218613" cy="604663"/>
+          </a:xfrm>
+        </p:grpSpPr>
+        <p:sp>
+          <p:nvSpPr>
+            <p:cNvPr id="41" name="Rectangle 40">
+              <a:extLst>
+                <a:ext uri="{FF2B5EF4-FFF2-40B4-BE49-F238E27FC236}">
+                  <a16:creationId xmlns:a16="http://schemas.microsoft.com/office/drawing/2014/main" id="{2E6D5310-B9F2-81B5-036F-87E4E2D1DB7C}"/>
+                </a:ext>
+              </a:extLst>
+            </p:cNvPr>
+            <p:cNvSpPr/>
+            <p:nvPr/>
+          </p:nvSpPr>
+          <p:spPr>
+            <a:xfrm>
+              <a:off x="3204936" y="4847260"/>
+              <a:ext cx="3218612" cy="604663"/>
+            </a:xfrm>
+            <a:prstGeom prst="rect">
+              <a:avLst/>
+            </a:prstGeom>
+            <a:solidFill>
+              <a:srgbClr val="00FF00"/>
+            </a:solidFill>
+            <a:ln>
+              <a:noFill/>
+            </a:ln>
+          </p:spPr>
+          <p:style>
+            <a:lnRef idx="2">
+              <a:schemeClr val="accent1">
+                <a:shade val="50000"/>
+              </a:schemeClr>
+            </a:lnRef>
+            <a:fillRef idx="1">
+              <a:schemeClr val="accent1"/>
+            </a:fillRef>
+            <a:effectRef idx="0">
+              <a:schemeClr val="accent1"/>
+            </a:effectRef>
+            <a:fontRef idx="minor">
+              <a:schemeClr val="lt1"/>
+            </a:fontRef>
+          </p:style>
+          <p:txBody>
+            <a:bodyPr rtlCol="0" anchor="ctr"/>
+            <a:lstStyle/>
+            <a:p>
+              <a:pPr algn="ctr"/>
+              <a:endParaRPr lang="en-IN" dirty="0"/>
+            </a:p>
+          </p:txBody>
+        </p:sp>
+        <p:sp>
+          <p:nvSpPr>
+            <p:cNvPr id="44" name="Rectangle 43">
+              <a:extLst>
+                <a:ext uri="{FF2B5EF4-FFF2-40B4-BE49-F238E27FC236}">
+                  <a16:creationId xmlns:a16="http://schemas.microsoft.com/office/drawing/2014/main" id="{C21FF119-6643-06E3-1040-766CF36ACE5A}"/>
+                </a:ext>
+              </a:extLst>
+            </p:cNvPr>
+            <p:cNvSpPr/>
+            <p:nvPr/>
+          </p:nvSpPr>
+          <p:spPr>
+            <a:xfrm>
+              <a:off x="3216734" y="5167835"/>
+              <a:ext cx="2072737" cy="274716"/>
+            </a:xfrm>
+            <a:prstGeom prst="rect">
+              <a:avLst/>
+            </a:prstGeom>
+            <a:noFill/>
+            <a:ln>
+              <a:noFill/>
+            </a:ln>
+          </p:spPr>
+          <p:style>
+            <a:lnRef idx="2">
+              <a:schemeClr val="accent1">
+                <a:shade val="50000"/>
+              </a:schemeClr>
+            </a:lnRef>
+            <a:fillRef idx="1">
+              <a:schemeClr val="accent1"/>
+            </a:fillRef>
+            <a:effectRef idx="0">
+              <a:schemeClr val="accent1"/>
+            </a:effectRef>
+            <a:fontRef idx="minor">
+              <a:schemeClr val="lt1"/>
+            </a:fontRef>
+          </p:style>
+          <p:txBody>
+            <a:bodyPr rtlCol="0" anchor="ctr"/>
+            <a:lstStyle/>
+            <a:p>
+              <a:r>
+                <a:rPr lang="en-US" sz="1600" dirty="0">
+                  <a:solidFill>
+                    <a:schemeClr val="tx1">
+                      <a:lumMod val="95000"/>
+                      <a:lumOff val="5000"/>
+                    </a:schemeClr>
+                  </a:solidFill>
+                </a:rPr>
+                <a:t>Non-S</a:t>
+              </a:r>
+              <a:r>
+                <a:rPr lang="en-IN" sz="1600" dirty="0">
+                  <a:solidFill>
+                    <a:schemeClr val="tx1">
+                      <a:lumMod val="95000"/>
+                      <a:lumOff val="5000"/>
+                    </a:schemeClr>
+                  </a:solidFill>
+                </a:rPr>
+                <a:t>moker</a:t>
+              </a:r>
+            </a:p>
+          </p:txBody>
+        </p:sp>
+        <p:sp>
+          <p:nvSpPr>
+            <p:cNvPr id="46" name="Rectangle 45">
+              <a:extLst>
+                <a:ext uri="{FF2B5EF4-FFF2-40B4-BE49-F238E27FC236}">
+                  <a16:creationId xmlns:a16="http://schemas.microsoft.com/office/drawing/2014/main" id="{E858CE1A-955B-DD58-E5DF-6C78215857CD}"/>
+                </a:ext>
+              </a:extLst>
+            </p:cNvPr>
+            <p:cNvSpPr/>
+            <p:nvPr/>
+          </p:nvSpPr>
+          <p:spPr>
+            <a:xfrm>
+              <a:off x="4683420" y="5172863"/>
+              <a:ext cx="1740129" cy="269688"/>
+            </a:xfrm>
+            <a:prstGeom prst="rect">
+              <a:avLst/>
+            </a:prstGeom>
+            <a:noFill/>
+            <a:ln>
+              <a:noFill/>
+            </a:ln>
+          </p:spPr>
+          <p:style>
+            <a:lnRef idx="2">
+              <a:schemeClr val="accent1">
+                <a:shade val="50000"/>
+              </a:schemeClr>
+            </a:lnRef>
+            <a:fillRef idx="1">
+              <a:schemeClr val="accent1"/>
+            </a:fillRef>
+            <a:effectRef idx="0">
+              <a:schemeClr val="accent1"/>
+            </a:effectRef>
+            <a:fontRef idx="minor">
+              <a:schemeClr val="lt1"/>
+            </a:fontRef>
+          </p:style>
+          <p:txBody>
+            <a:bodyPr rtlCol="0" anchor="ctr"/>
+            <a:lstStyle/>
+            <a:p>
+              <a:pPr algn="r"/>
+              <a:r>
+                <a:rPr lang="en-US" sz="1600" dirty="0">
+                  <a:solidFill>
+                    <a:schemeClr val="tx1">
+                      <a:lumMod val="95000"/>
+                      <a:lumOff val="5000"/>
+                    </a:schemeClr>
+                  </a:solidFill>
+                </a:rPr>
+                <a:t>51%</a:t>
+              </a:r>
+              <a:endParaRPr lang="en-IN" sz="1600" dirty="0">
+                <a:solidFill>
+                  <a:schemeClr val="tx1">
+                    <a:lumMod val="95000"/>
+                    <a:lumOff val="5000"/>
+                  </a:schemeClr>
+                </a:solidFill>
+              </a:endParaRPr>
+            </a:p>
+          </p:txBody>
+        </p:sp>
+      </p:grpSp>
+      <p:grpSp>
+        <p:nvGrpSpPr>
+          <p:cNvPr id="49" name="Group 48">
+            <a:extLst>
+              <a:ext uri="{FF2B5EF4-FFF2-40B4-BE49-F238E27FC236}">
+                <a16:creationId xmlns:a16="http://schemas.microsoft.com/office/drawing/2014/main" id="{BB4B6904-5233-35C1-EF7E-2950473EE4F5}"/>
+              </a:ext>
+            </a:extLst>
+          </p:cNvPr>
+          <p:cNvGrpSpPr/>
+          <p:nvPr/>
+        </p:nvGrpSpPr>
+        <p:grpSpPr>
+          <a:xfrm>
+            <a:off x="9007521" y="3400909"/>
+            <a:ext cx="1705971" cy="533163"/>
+            <a:chOff x="3201492" y="5451923"/>
+            <a:chExt cx="3012986" cy="610482"/>
+          </a:xfrm>
+        </p:grpSpPr>
+        <p:sp>
+          <p:nvSpPr>
+            <p:cNvPr id="42" name="Rectangle 41">
+              <a:extLst>
+                <a:ext uri="{FF2B5EF4-FFF2-40B4-BE49-F238E27FC236}">
+                  <a16:creationId xmlns:a16="http://schemas.microsoft.com/office/drawing/2014/main" id="{43B5DFAB-8610-E2C3-6BA7-4AF711BDD4FD}"/>
+                </a:ext>
+              </a:extLst>
+            </p:cNvPr>
+            <p:cNvSpPr/>
+            <p:nvPr/>
+          </p:nvSpPr>
+          <p:spPr>
+            <a:xfrm>
+              <a:off x="3201494" y="5451923"/>
+              <a:ext cx="3012984" cy="604663"/>
+            </a:xfrm>
+            <a:prstGeom prst="rect">
+              <a:avLst/>
+            </a:prstGeom>
+            <a:solidFill>
+              <a:srgbClr val="FFFF00"/>
+            </a:solidFill>
+            <a:ln>
+              <a:noFill/>
+            </a:ln>
+          </p:spPr>
+          <p:style>
+            <a:lnRef idx="2">
+              <a:schemeClr val="accent1">
+                <a:shade val="50000"/>
+              </a:schemeClr>
+            </a:lnRef>
+            <a:fillRef idx="1">
+              <a:schemeClr val="accent1"/>
+            </a:fillRef>
+            <a:effectRef idx="0">
+              <a:schemeClr val="accent1"/>
+            </a:effectRef>
+            <a:fontRef idx="minor">
+              <a:schemeClr val="lt1"/>
+            </a:fontRef>
+          </p:style>
+          <p:txBody>
+            <a:bodyPr rtlCol="0" anchor="ctr"/>
+            <a:lstStyle/>
+            <a:p>
+              <a:pPr algn="ctr"/>
+              <a:endParaRPr lang="en-IN"/>
+            </a:p>
+          </p:txBody>
+        </p:sp>
+        <p:sp>
+          <p:nvSpPr>
+            <p:cNvPr id="45" name="Rectangle 44">
+              <a:extLst>
+                <a:ext uri="{FF2B5EF4-FFF2-40B4-BE49-F238E27FC236}">
+                  <a16:creationId xmlns:a16="http://schemas.microsoft.com/office/drawing/2014/main" id="{6E720F9F-3E81-DC66-B39D-697552F82204}"/>
+                </a:ext>
+              </a:extLst>
+            </p:cNvPr>
+            <p:cNvSpPr/>
+            <p:nvPr/>
+          </p:nvSpPr>
+          <p:spPr>
+            <a:xfrm>
+              <a:off x="3201492" y="5763583"/>
+              <a:ext cx="3012984" cy="275192"/>
+            </a:xfrm>
+            <a:prstGeom prst="rect">
+              <a:avLst/>
+            </a:prstGeom>
+            <a:noFill/>
+            <a:ln>
+              <a:noFill/>
+            </a:ln>
+          </p:spPr>
+          <p:style>
+            <a:lnRef idx="2">
+              <a:schemeClr val="accent1">
+                <a:shade val="50000"/>
+              </a:schemeClr>
+            </a:lnRef>
+            <a:fillRef idx="1">
+              <a:schemeClr val="accent1"/>
+            </a:fillRef>
+            <a:effectRef idx="0">
+              <a:schemeClr val="accent1"/>
+            </a:effectRef>
+            <a:fontRef idx="minor">
+              <a:schemeClr val="lt1"/>
+            </a:fontRef>
+          </p:style>
+          <p:txBody>
+            <a:bodyPr rtlCol="0" anchor="ctr"/>
+            <a:lstStyle/>
+            <a:p>
+              <a:r>
+                <a:rPr lang="en-US" sz="1600" dirty="0">
+                  <a:solidFill>
+                    <a:schemeClr val="tx1">
+                      <a:lumMod val="95000"/>
+                      <a:lumOff val="5000"/>
+                    </a:schemeClr>
+                  </a:solidFill>
+                </a:rPr>
+                <a:t>S</a:t>
+              </a:r>
+              <a:r>
+                <a:rPr lang="en-IN" sz="1600" dirty="0">
+                  <a:solidFill>
+                    <a:schemeClr val="tx1">
+                      <a:lumMod val="95000"/>
+                      <a:lumOff val="5000"/>
+                    </a:schemeClr>
+                  </a:solidFill>
+                </a:rPr>
+                <a:t>moker</a:t>
+              </a:r>
+            </a:p>
+          </p:txBody>
+        </p:sp>
+        <p:sp>
+          <p:nvSpPr>
+            <p:cNvPr id="47" name="Rectangle 46">
+              <a:extLst>
+                <a:ext uri="{FF2B5EF4-FFF2-40B4-BE49-F238E27FC236}">
+                  <a16:creationId xmlns:a16="http://schemas.microsoft.com/office/drawing/2014/main" id="{2FEFEEF1-746C-66E7-AC0A-0E2D0C2F474A}"/>
+                </a:ext>
+              </a:extLst>
+            </p:cNvPr>
+            <p:cNvSpPr/>
+            <p:nvPr/>
+          </p:nvSpPr>
+          <p:spPr>
+            <a:xfrm>
+              <a:off x="4530567" y="5770907"/>
+              <a:ext cx="1683911" cy="291498"/>
+            </a:xfrm>
+            <a:prstGeom prst="rect">
+              <a:avLst/>
+            </a:prstGeom>
+            <a:noFill/>
+            <a:ln>
+              <a:noFill/>
+            </a:ln>
+          </p:spPr>
+          <p:style>
+            <a:lnRef idx="2">
+              <a:schemeClr val="accent1">
+                <a:shade val="50000"/>
+              </a:schemeClr>
+            </a:lnRef>
+            <a:fillRef idx="1">
+              <a:schemeClr val="accent1"/>
+            </a:fillRef>
+            <a:effectRef idx="0">
+              <a:schemeClr val="accent1"/>
+            </a:effectRef>
+            <a:fontRef idx="minor">
+              <a:schemeClr val="lt1"/>
+            </a:fontRef>
+          </p:style>
+          <p:txBody>
+            <a:bodyPr rtlCol="0" anchor="ctr"/>
+            <a:lstStyle/>
+            <a:p>
+              <a:pPr algn="r"/>
+              <a:r>
+                <a:rPr lang="en-US" sz="1600" dirty="0">
+                  <a:solidFill>
+                    <a:schemeClr val="tx1">
+                      <a:lumMod val="95000"/>
+                      <a:lumOff val="5000"/>
+                    </a:schemeClr>
+                  </a:solidFill>
+                </a:rPr>
+                <a:t>49%</a:t>
+              </a:r>
+              <a:endParaRPr lang="en-IN" sz="1600" dirty="0">
+                <a:solidFill>
+                  <a:schemeClr val="tx1">
+                    <a:lumMod val="95000"/>
+                    <a:lumOff val="5000"/>
+                  </a:schemeClr>
+                </a:solidFill>
+              </a:endParaRPr>
+            </a:p>
+          </p:txBody>
+        </p:sp>
+      </p:grpSp>
+      <p:sp>
+        <p:nvSpPr>
+          <p:cNvPr id="50" name="Rectangle 49">
+            <a:extLst>
+              <a:ext uri="{FF2B5EF4-FFF2-40B4-BE49-F238E27FC236}">
+                <a16:creationId xmlns:a16="http://schemas.microsoft.com/office/drawing/2014/main" id="{E9DA75A7-EB2A-96E6-8BF0-4835FFF5B255}"/>
+              </a:ext>
+            </a:extLst>
+          </p:cNvPr>
+          <p:cNvSpPr/>
+          <p:nvPr/>
+        </p:nvSpPr>
+        <p:spPr>
+          <a:xfrm>
+            <a:off x="6685125" y="3920584"/>
+            <a:ext cx="4028367" cy="527541"/>
+          </a:xfrm>
+          <a:prstGeom prst="rect">
+            <a:avLst/>
+          </a:prstGeom>
+          <a:solidFill>
+            <a:srgbClr val="FF00FF"/>
+          </a:solidFill>
+          <a:ln>
+            <a:noFill/>
+          </a:ln>
+        </p:spPr>
+        <p:style>
+          <a:lnRef idx="2">
+            <a:schemeClr val="accent1">
+              <a:shade val="50000"/>
+            </a:schemeClr>
+          </a:lnRef>
+          <a:fillRef idx="1">
+            <a:schemeClr val="accent1"/>
+          </a:fillRef>
+          <a:effectRef idx="0">
+            <a:schemeClr val="accent1"/>
+          </a:effectRef>
+          <a:fontRef idx="minor">
+            <a:schemeClr val="lt1"/>
+          </a:fontRef>
+        </p:style>
+        <p:txBody>
+          <a:bodyPr rtlCol="0" anchor="ctr"/>
+          <a:lstStyle/>
+          <a:p>
+            <a:r>
+              <a:rPr lang="en-IN" dirty="0">
+                <a:solidFill>
+                  <a:schemeClr val="tx1">
+                    <a:lumMod val="95000"/>
+                    <a:lumOff val="5000"/>
+                  </a:schemeClr>
+                </a:solidFill>
+              </a:rPr>
+              <a:t>Expenses</a:t>
+            </a:r>
+          </a:p>
+        </p:txBody>
+      </p:sp>
     </p:spTree>
     <p:extLst>
       <p:ext uri="{BB962C8B-B14F-4D97-AF65-F5344CB8AC3E}">
@@ -5708,7 +7391,7 @@
         </p:blipFill>
         <p:spPr>
           <a:xfrm>
-            <a:off x="650543" y="1589657"/>
+            <a:off x="764843" y="1506219"/>
             <a:ext cx="6036859" cy="3210941"/>
           </a:xfrm>
           <a:prstGeom prst="rect">
@@ -6122,7 +7805,29 @@
                   </a:schemeClr>
                 </a:solidFill>
               </a:rPr>
-              <a:t>When number of children of a person increase then expenses also decrease.</a:t>
+              <a:t>BMI wise expenses ratio is flatulate, not an increasing order over </a:t>
+            </a:r>
+            <a:r>
+              <a:rPr lang="en-IN" dirty="0" err="1">
+                <a:solidFill>
+                  <a:schemeClr val="tx1">
+                    <a:lumMod val="95000"/>
+                    <a:lumOff val="5000"/>
+                  </a:schemeClr>
+                </a:solidFill>
+              </a:rPr>
+              <a:t>bmi</a:t>
+            </a:r>
+            <a:r>
+              <a:rPr lang="en-IN" dirty="0">
+                <a:solidFill>
+                  <a:schemeClr val="tx1">
+                    <a:lumMod val="95000"/>
+                    <a:lumOff val="5000"/>
+                  </a:schemeClr>
+                </a:solidFill>
+              </a:rPr>
+              <a:t>. </a:t>
             </a:r>
           </a:p>
         </p:txBody>
@@ -6181,6 +7886,259 @@
                   </a:schemeClr>
                 </a:solidFill>
               </a:rPr>
+              <a:t>Expenses by BMI:</a:t>
+            </a:r>
+          </a:p>
+        </p:txBody>
+      </p:sp>
+      <p:pic>
+        <p:nvPicPr>
+          <p:cNvPr id="7" name="Picture 6">
+            <a:extLst>
+              <a:ext uri="{FF2B5EF4-FFF2-40B4-BE49-F238E27FC236}">
+                <a16:creationId xmlns:a16="http://schemas.microsoft.com/office/drawing/2014/main" id="{5AA0E7AE-2BF0-0D83-19F9-180E91D0C283}"/>
+              </a:ext>
+            </a:extLst>
+          </p:cNvPr>
+          <p:cNvPicPr>
+            <a:picLocks noChangeAspect="1"/>
+          </p:cNvPicPr>
+          <p:nvPr/>
+        </p:nvPicPr>
+        <p:blipFill>
+          <a:blip r:embed="rId3">
+            <a:extLst>
+              <a:ext uri="{28A0092B-C50C-407E-A947-70E740481C1C}">
+                <a14:useLocalDpi xmlns:a14="http://schemas.microsoft.com/office/drawing/2010/main" val="0"/>
+              </a:ext>
+            </a:extLst>
+          </a:blip>
+          <a:stretch>
+            <a:fillRect/>
+          </a:stretch>
+        </p:blipFill>
+        <p:spPr>
+          <a:xfrm>
+            <a:off x="650543" y="1318777"/>
+            <a:ext cx="8002138" cy="3526177"/>
+          </a:xfrm>
+          <a:prstGeom prst="rect">
+            <a:avLst/>
+          </a:prstGeom>
+        </p:spPr>
+      </p:pic>
+    </p:spTree>
+    <p:extLst>
+      <p:ext uri="{BB962C8B-B14F-4D97-AF65-F5344CB8AC3E}">
+        <p14:creationId xmlns:p14="http://schemas.microsoft.com/office/powerpoint/2010/main" val="703496864"/>
+      </p:ext>
+    </p:extLst>
+  </p:cSld>
+  <p:clrMapOvr>
+    <a:masterClrMapping/>
+  </p:clrMapOvr>
+</p:sld>
+</file>
+
+<file path=ppt/slides/slide7.xml><?xml version="1.0" encoding="utf-8"?>
+<p:sld xmlns:a="http://schemas.openxmlformats.org/drawingml/2006/main" xmlns:r="http://schemas.openxmlformats.org/officeDocument/2006/relationships" xmlns:p="http://schemas.openxmlformats.org/presentationml/2006/main">
+  <p:cSld>
+    <p:spTree>
+      <p:nvGrpSpPr>
+        <p:cNvPr id="1" name=""/>
+        <p:cNvGrpSpPr/>
+        <p:nvPr/>
+      </p:nvGrpSpPr>
+      <p:grpSpPr>
+        <a:xfrm>
+          <a:off x="0" y="0"/>
+          <a:ext cx="0" cy="0"/>
+          <a:chOff x="0" y="0"/>
+          <a:chExt cx="0" cy="0"/>
+        </a:xfrm>
+      </p:grpSpPr>
+      <p:pic>
+        <p:nvPicPr>
+          <p:cNvPr id="4" name="Picture 3">
+            <a:extLst>
+              <a:ext uri="{FF2B5EF4-FFF2-40B4-BE49-F238E27FC236}">
+                <a16:creationId xmlns:a16="http://schemas.microsoft.com/office/drawing/2014/main" id="{0C5620D7-DFC3-12A3-E092-299D0B9E576C}"/>
+              </a:ext>
+            </a:extLst>
+          </p:cNvPr>
+          <p:cNvPicPr>
+            <a:picLocks noChangeAspect="1"/>
+          </p:cNvPicPr>
+          <p:nvPr/>
+        </p:nvPicPr>
+        <p:blipFill rotWithShape="1">
+          <a:blip r:embed="rId2"/>
+          <a:srcRect l="18040" t="15174" r="17378" b="16187"/>
+          <a:stretch/>
+        </p:blipFill>
+        <p:spPr>
+          <a:xfrm>
+            <a:off x="11352346" y="100154"/>
+            <a:ext cx="642077" cy="682387"/>
+          </a:xfrm>
+          <a:prstGeom prst="rect">
+            <a:avLst/>
+          </a:prstGeom>
+        </p:spPr>
+      </p:pic>
+      <p:sp>
+        <p:nvSpPr>
+          <p:cNvPr id="2" name="Rectangle 1">
+            <a:extLst>
+              <a:ext uri="{FF2B5EF4-FFF2-40B4-BE49-F238E27FC236}">
+                <a16:creationId xmlns:a16="http://schemas.microsoft.com/office/drawing/2014/main" id="{7F646111-1C7E-D0B5-9AC1-731C044827EA}"/>
+              </a:ext>
+            </a:extLst>
+          </p:cNvPr>
+          <p:cNvSpPr/>
+          <p:nvPr/>
+        </p:nvSpPr>
+        <p:spPr>
+          <a:xfrm>
+            <a:off x="6687402" y="5104263"/>
+            <a:ext cx="4664943" cy="1221473"/>
+          </a:xfrm>
+          <a:prstGeom prst="rect">
+            <a:avLst/>
+          </a:prstGeom>
+          <a:noFill/>
+          <a:ln>
+            <a:solidFill>
+              <a:schemeClr val="tx1">
+                <a:lumMod val="95000"/>
+                <a:lumOff val="5000"/>
+              </a:schemeClr>
+            </a:solidFill>
+          </a:ln>
+        </p:spPr>
+        <p:style>
+          <a:lnRef idx="2">
+            <a:schemeClr val="accent1">
+              <a:shade val="50000"/>
+            </a:schemeClr>
+          </a:lnRef>
+          <a:fillRef idx="1">
+            <a:schemeClr val="accent1"/>
+          </a:fillRef>
+          <a:effectRef idx="0">
+            <a:schemeClr val="accent1"/>
+          </a:effectRef>
+          <a:fontRef idx="minor">
+            <a:schemeClr val="lt1"/>
+          </a:fontRef>
+        </p:style>
+        <p:txBody>
+          <a:bodyPr rtlCol="0" anchor="ctr"/>
+          <a:lstStyle/>
+          <a:p>
+            <a:r>
+              <a:rPr lang="en-IN" sz="2000" b="1" dirty="0">
+                <a:solidFill>
+                  <a:schemeClr val="tx1">
+                    <a:lumMod val="95000"/>
+                    <a:lumOff val="5000"/>
+                  </a:schemeClr>
+                </a:solidFill>
+              </a:rPr>
+              <a:t>Insight:</a:t>
+            </a:r>
+            <a:endParaRPr lang="en-IN" sz="2000" dirty="0">
+              <a:solidFill>
+                <a:schemeClr val="tx1">
+                  <a:lumMod val="95000"/>
+                  <a:lumOff val="5000"/>
+                </a:schemeClr>
+              </a:solidFill>
+            </a:endParaRPr>
+          </a:p>
+          <a:p>
+            <a:endParaRPr lang="en-IN" dirty="0">
+              <a:solidFill>
+                <a:schemeClr val="tx1">
+                  <a:lumMod val="95000"/>
+                  <a:lumOff val="5000"/>
+                </a:schemeClr>
+              </a:solidFill>
+            </a:endParaRPr>
+          </a:p>
+          <a:p>
+            <a:pPr marL="285750" indent="-285750">
+              <a:buFont typeface="Arial" panose="020B0604020202020204" pitchFamily="34" charset="0"/>
+              <a:buChar char="•"/>
+            </a:pPr>
+            <a:r>
+              <a:rPr lang="en-IN" dirty="0">
+                <a:solidFill>
+                  <a:schemeClr val="tx1">
+                    <a:lumMod val="95000"/>
+                    <a:lumOff val="5000"/>
+                  </a:schemeClr>
+                </a:solidFill>
+              </a:rPr>
+              <a:t>When number of children of a person increase then expenses also decrease.</a:t>
+            </a:r>
+          </a:p>
+        </p:txBody>
+      </p:sp>
+      <p:sp>
+        <p:nvSpPr>
+          <p:cNvPr id="6" name="Rectangle 5">
+            <a:extLst>
+              <a:ext uri="{FF2B5EF4-FFF2-40B4-BE49-F238E27FC236}">
+                <a16:creationId xmlns:a16="http://schemas.microsoft.com/office/drawing/2014/main" id="{CA91AEAA-EFAA-4997-F625-9A77A59F2FCD}"/>
+              </a:ext>
+            </a:extLst>
+          </p:cNvPr>
+          <p:cNvSpPr/>
+          <p:nvPr/>
+        </p:nvSpPr>
+        <p:spPr>
+          <a:xfrm>
+            <a:off x="650543" y="532265"/>
+            <a:ext cx="10062950" cy="586852"/>
+          </a:xfrm>
+          <a:prstGeom prst="rect">
+            <a:avLst/>
+          </a:prstGeom>
+          <a:noFill/>
+          <a:ln>
+            <a:noFill/>
+          </a:ln>
+        </p:spPr>
+        <p:style>
+          <a:lnRef idx="2">
+            <a:schemeClr val="accent1">
+              <a:shade val="50000"/>
+            </a:schemeClr>
+          </a:lnRef>
+          <a:fillRef idx="1">
+            <a:schemeClr val="accent1"/>
+          </a:fillRef>
+          <a:effectRef idx="0">
+            <a:schemeClr val="accent1"/>
+          </a:effectRef>
+          <a:fontRef idx="minor">
+            <a:schemeClr val="lt1"/>
+          </a:fontRef>
+        </p:style>
+        <p:txBody>
+          <a:bodyPr rtlCol="0" anchor="ctr"/>
+          <a:lstStyle/>
+          <a:p>
+            <a:r>
+              <a:rPr lang="en-IN" sz="2400" dirty="0">
+                <a:solidFill>
+                  <a:schemeClr val="tx1">
+                    <a:lumMod val="95000"/>
+                    <a:lumOff val="5000"/>
+                  </a:schemeClr>
+                </a:solidFill>
+              </a:rPr>
               <a:t>Expenses by Children:</a:t>
             </a:r>
           </a:p>
@@ -6235,7 +8193,1627 @@
 </p:sld>
 </file>
 
-<file path=ppt/slides/slide7.xml><?xml version="1.0" encoding="utf-8"?>
+<file path=ppt/slides/slide8.xml><?xml version="1.0" encoding="utf-8"?>
+<p:sld xmlns:a="http://schemas.openxmlformats.org/drawingml/2006/main" xmlns:r="http://schemas.openxmlformats.org/officeDocument/2006/relationships" xmlns:p="http://schemas.openxmlformats.org/presentationml/2006/main">
+  <p:cSld>
+    <p:spTree>
+      <p:nvGrpSpPr>
+        <p:cNvPr id="1" name=""/>
+        <p:cNvGrpSpPr/>
+        <p:nvPr/>
+      </p:nvGrpSpPr>
+      <p:grpSpPr>
+        <a:xfrm>
+          <a:off x="0" y="0"/>
+          <a:ext cx="0" cy="0"/>
+          <a:chOff x="0" y="0"/>
+          <a:chExt cx="0" cy="0"/>
+        </a:xfrm>
+      </p:grpSpPr>
+      <p:pic>
+        <p:nvPicPr>
+          <p:cNvPr id="4" name="Picture 3">
+            <a:extLst>
+              <a:ext uri="{FF2B5EF4-FFF2-40B4-BE49-F238E27FC236}">
+                <a16:creationId xmlns:a16="http://schemas.microsoft.com/office/drawing/2014/main" id="{0C5620D7-DFC3-12A3-E092-299D0B9E576C}"/>
+              </a:ext>
+            </a:extLst>
+          </p:cNvPr>
+          <p:cNvPicPr>
+            <a:picLocks noChangeAspect="1"/>
+          </p:cNvPicPr>
+          <p:nvPr/>
+        </p:nvPicPr>
+        <p:blipFill rotWithShape="1">
+          <a:blip r:embed="rId2"/>
+          <a:srcRect l="18040" t="15174" r="17378" b="16187"/>
+          <a:stretch/>
+        </p:blipFill>
+        <p:spPr>
+          <a:xfrm>
+            <a:off x="11352346" y="100154"/>
+            <a:ext cx="642077" cy="682387"/>
+          </a:xfrm>
+          <a:prstGeom prst="rect">
+            <a:avLst/>
+          </a:prstGeom>
+        </p:spPr>
+      </p:pic>
+      <p:sp>
+        <p:nvSpPr>
+          <p:cNvPr id="6" name="Rectangle 5">
+            <a:extLst>
+              <a:ext uri="{FF2B5EF4-FFF2-40B4-BE49-F238E27FC236}">
+                <a16:creationId xmlns:a16="http://schemas.microsoft.com/office/drawing/2014/main" id="{CA91AEAA-EFAA-4997-F625-9A77A59F2FCD}"/>
+              </a:ext>
+            </a:extLst>
+          </p:cNvPr>
+          <p:cNvSpPr/>
+          <p:nvPr/>
+        </p:nvSpPr>
+        <p:spPr>
+          <a:xfrm>
+            <a:off x="650543" y="532265"/>
+            <a:ext cx="10062950" cy="586852"/>
+          </a:xfrm>
+          <a:prstGeom prst="rect">
+            <a:avLst/>
+          </a:prstGeom>
+          <a:noFill/>
+          <a:ln>
+            <a:noFill/>
+          </a:ln>
+        </p:spPr>
+        <p:style>
+          <a:lnRef idx="2">
+            <a:schemeClr val="accent1">
+              <a:shade val="50000"/>
+            </a:schemeClr>
+          </a:lnRef>
+          <a:fillRef idx="1">
+            <a:schemeClr val="accent1"/>
+          </a:fillRef>
+          <a:effectRef idx="0">
+            <a:schemeClr val="accent1"/>
+          </a:effectRef>
+          <a:fontRef idx="minor">
+            <a:schemeClr val="lt1"/>
+          </a:fontRef>
+        </p:style>
+        <p:txBody>
+          <a:bodyPr rtlCol="0" anchor="ctr"/>
+          <a:lstStyle/>
+          <a:p>
+            <a:r>
+              <a:rPr lang="en-IN" sz="2400" dirty="0">
+                <a:solidFill>
+                  <a:schemeClr val="tx1">
+                    <a:lumMod val="95000"/>
+                    <a:lumOff val="5000"/>
+                  </a:schemeClr>
+                </a:solidFill>
+              </a:rPr>
+              <a:t>Machine Learning Pipeline:</a:t>
+            </a:r>
+          </a:p>
+        </p:txBody>
+      </p:sp>
+      <p:grpSp>
+        <p:nvGrpSpPr>
+          <p:cNvPr id="68" name="Group 67">
+            <a:extLst>
+              <a:ext uri="{FF2B5EF4-FFF2-40B4-BE49-F238E27FC236}">
+                <a16:creationId xmlns:a16="http://schemas.microsoft.com/office/drawing/2014/main" id="{2862A736-1634-8093-0CC6-631E9DD654B3}"/>
+              </a:ext>
+            </a:extLst>
+          </p:cNvPr>
+          <p:cNvGrpSpPr/>
+          <p:nvPr/>
+        </p:nvGrpSpPr>
+        <p:grpSpPr>
+          <a:xfrm>
+            <a:off x="650543" y="1407992"/>
+            <a:ext cx="10340455" cy="4706205"/>
+            <a:chOff x="650543" y="1407992"/>
+            <a:chExt cx="10340455" cy="4706205"/>
+          </a:xfrm>
+        </p:grpSpPr>
+        <p:sp>
+          <p:nvSpPr>
+            <p:cNvPr id="60" name="Rectangle 59">
+              <a:extLst>
+                <a:ext uri="{FF2B5EF4-FFF2-40B4-BE49-F238E27FC236}">
+                  <a16:creationId xmlns:a16="http://schemas.microsoft.com/office/drawing/2014/main" id="{B2353796-9BD9-0672-B159-FAD878ACBC78}"/>
+                </a:ext>
+              </a:extLst>
+            </p:cNvPr>
+            <p:cNvSpPr/>
+            <p:nvPr/>
+          </p:nvSpPr>
+          <p:spPr>
+            <a:xfrm>
+              <a:off x="928048" y="3514854"/>
+              <a:ext cx="10062950" cy="2599343"/>
+            </a:xfrm>
+            <a:prstGeom prst="rect">
+              <a:avLst/>
+            </a:prstGeom>
+            <a:noFill/>
+            <a:ln>
+              <a:solidFill>
+                <a:schemeClr val="accent1">
+                  <a:lumMod val="50000"/>
+                </a:schemeClr>
+              </a:solidFill>
+            </a:ln>
+          </p:spPr>
+          <p:style>
+            <a:lnRef idx="2">
+              <a:schemeClr val="accent1">
+                <a:shade val="50000"/>
+              </a:schemeClr>
+            </a:lnRef>
+            <a:fillRef idx="1">
+              <a:schemeClr val="accent1"/>
+            </a:fillRef>
+            <a:effectRef idx="0">
+              <a:schemeClr val="accent1"/>
+            </a:effectRef>
+            <a:fontRef idx="minor">
+              <a:schemeClr val="lt1"/>
+            </a:fontRef>
+          </p:style>
+          <p:txBody>
+            <a:bodyPr rtlCol="0" anchor="ctr"/>
+            <a:lstStyle/>
+            <a:p>
+              <a:pPr algn="ctr"/>
+              <a:endParaRPr lang="en-IN"/>
+            </a:p>
+          </p:txBody>
+        </p:sp>
+        <p:sp>
+          <p:nvSpPr>
+            <p:cNvPr id="3" name="Rectangle 2">
+              <a:extLst>
+                <a:ext uri="{FF2B5EF4-FFF2-40B4-BE49-F238E27FC236}">
+                  <a16:creationId xmlns:a16="http://schemas.microsoft.com/office/drawing/2014/main" id="{08756310-3ECF-5C80-E0A4-9144B6758C2E}"/>
+                </a:ext>
+              </a:extLst>
+            </p:cNvPr>
+            <p:cNvSpPr/>
+            <p:nvPr/>
+          </p:nvSpPr>
+          <p:spPr>
+            <a:xfrm>
+              <a:off x="650543" y="1407992"/>
+              <a:ext cx="1642281" cy="477671"/>
+            </a:xfrm>
+            <a:prstGeom prst="rect">
+              <a:avLst/>
+            </a:prstGeom>
+            <a:noFill/>
+            <a:ln>
+              <a:solidFill>
+                <a:schemeClr val="tx1">
+                  <a:lumMod val="95000"/>
+                  <a:lumOff val="5000"/>
+                </a:schemeClr>
+              </a:solidFill>
+            </a:ln>
+          </p:spPr>
+          <p:style>
+            <a:lnRef idx="2">
+              <a:schemeClr val="accent1">
+                <a:shade val="50000"/>
+              </a:schemeClr>
+            </a:lnRef>
+            <a:fillRef idx="1">
+              <a:schemeClr val="accent1"/>
+            </a:fillRef>
+            <a:effectRef idx="0">
+              <a:schemeClr val="accent1"/>
+            </a:effectRef>
+            <a:fontRef idx="minor">
+              <a:schemeClr val="lt1"/>
+            </a:fontRef>
+          </p:style>
+          <p:txBody>
+            <a:bodyPr rtlCol="0" anchor="ctr"/>
+            <a:lstStyle/>
+            <a:p>
+              <a:pPr algn="ctr"/>
+              <a:r>
+                <a:rPr lang="en-US" dirty="0">
+                  <a:solidFill>
+                    <a:schemeClr val="tx1">
+                      <a:lumMod val="95000"/>
+                      <a:lumOff val="5000"/>
+                    </a:schemeClr>
+                  </a:solidFill>
+                </a:rPr>
+                <a:t>Data Collection</a:t>
+              </a:r>
+              <a:endParaRPr lang="en-IN" dirty="0">
+                <a:solidFill>
+                  <a:schemeClr val="tx1">
+                    <a:lumMod val="95000"/>
+                    <a:lumOff val="5000"/>
+                  </a:schemeClr>
+                </a:solidFill>
+              </a:endParaRPr>
+            </a:p>
+          </p:txBody>
+        </p:sp>
+        <p:sp>
+          <p:nvSpPr>
+            <p:cNvPr id="7" name="Rectangle 6">
+              <a:extLst>
+                <a:ext uri="{FF2B5EF4-FFF2-40B4-BE49-F238E27FC236}">
+                  <a16:creationId xmlns:a16="http://schemas.microsoft.com/office/drawing/2014/main" id="{AF43E949-74B6-70CA-4B88-6F1FA7FBCE5A}"/>
+                </a:ext>
+              </a:extLst>
+            </p:cNvPr>
+            <p:cNvSpPr/>
+            <p:nvPr/>
+          </p:nvSpPr>
+          <p:spPr>
+            <a:xfrm>
+              <a:off x="3244760" y="3707626"/>
+              <a:ext cx="1589963" cy="586852"/>
+            </a:xfrm>
+            <a:prstGeom prst="rect">
+              <a:avLst/>
+            </a:prstGeom>
+            <a:noFill/>
+            <a:ln>
+              <a:solidFill>
+                <a:schemeClr val="tx1">
+                  <a:lumMod val="95000"/>
+                  <a:lumOff val="5000"/>
+                </a:schemeClr>
+              </a:solidFill>
+            </a:ln>
+          </p:spPr>
+          <p:style>
+            <a:lnRef idx="2">
+              <a:schemeClr val="accent1">
+                <a:shade val="50000"/>
+              </a:schemeClr>
+            </a:lnRef>
+            <a:fillRef idx="1">
+              <a:schemeClr val="accent1"/>
+            </a:fillRef>
+            <a:effectRef idx="0">
+              <a:schemeClr val="accent1"/>
+            </a:effectRef>
+            <a:fontRef idx="minor">
+              <a:schemeClr val="lt1"/>
+            </a:fontRef>
+          </p:style>
+          <p:txBody>
+            <a:bodyPr rtlCol="0" anchor="ctr"/>
+            <a:lstStyle/>
+            <a:p>
+              <a:pPr algn="ctr"/>
+              <a:r>
+                <a:rPr lang="en-US" dirty="0">
+                  <a:solidFill>
+                    <a:schemeClr val="tx1">
+                      <a:lumMod val="95000"/>
+                      <a:lumOff val="5000"/>
+                    </a:schemeClr>
+                  </a:solidFill>
+                </a:rPr>
+                <a:t>Preprocessing</a:t>
+              </a:r>
+              <a:endParaRPr lang="en-IN" dirty="0">
+                <a:solidFill>
+                  <a:schemeClr val="tx1">
+                    <a:lumMod val="95000"/>
+                    <a:lumOff val="5000"/>
+                  </a:schemeClr>
+                </a:solidFill>
+              </a:endParaRPr>
+            </a:p>
+          </p:txBody>
+        </p:sp>
+        <p:sp>
+          <p:nvSpPr>
+            <p:cNvPr id="13" name="Rectangle 12">
+              <a:extLst>
+                <a:ext uri="{FF2B5EF4-FFF2-40B4-BE49-F238E27FC236}">
+                  <a16:creationId xmlns:a16="http://schemas.microsoft.com/office/drawing/2014/main" id="{C0409F5B-A669-F457-9545-D12F3E617EAC}"/>
+                </a:ext>
+              </a:extLst>
+            </p:cNvPr>
+            <p:cNvSpPr/>
+            <p:nvPr/>
+          </p:nvSpPr>
+          <p:spPr>
+            <a:xfrm>
+              <a:off x="650543" y="2564633"/>
+              <a:ext cx="1642281" cy="464023"/>
+            </a:xfrm>
+            <a:prstGeom prst="rect">
+              <a:avLst/>
+            </a:prstGeom>
+            <a:noFill/>
+            <a:ln>
+              <a:solidFill>
+                <a:schemeClr val="tx1">
+                  <a:lumMod val="95000"/>
+                  <a:lumOff val="5000"/>
+                </a:schemeClr>
+              </a:solidFill>
+            </a:ln>
+          </p:spPr>
+          <p:style>
+            <a:lnRef idx="2">
+              <a:schemeClr val="accent1">
+                <a:shade val="50000"/>
+              </a:schemeClr>
+            </a:lnRef>
+            <a:fillRef idx="1">
+              <a:schemeClr val="accent1"/>
+            </a:fillRef>
+            <a:effectRef idx="0">
+              <a:schemeClr val="accent1"/>
+            </a:effectRef>
+            <a:fontRef idx="minor">
+              <a:schemeClr val="lt1"/>
+            </a:fontRef>
+          </p:style>
+          <p:txBody>
+            <a:bodyPr rtlCol="0" anchor="ctr"/>
+            <a:lstStyle/>
+            <a:p>
+              <a:pPr algn="ctr"/>
+              <a:r>
+                <a:rPr lang="en-US" dirty="0">
+                  <a:solidFill>
+                    <a:schemeClr val="tx1">
+                      <a:lumMod val="95000"/>
+                      <a:lumOff val="5000"/>
+                    </a:schemeClr>
+                  </a:solidFill>
+                </a:rPr>
+                <a:t>Analyzed Data</a:t>
+              </a:r>
+              <a:endParaRPr lang="en-IN" dirty="0">
+                <a:solidFill>
+                  <a:schemeClr val="tx1">
+                    <a:lumMod val="95000"/>
+                    <a:lumOff val="5000"/>
+                  </a:schemeClr>
+                </a:solidFill>
+              </a:endParaRPr>
+            </a:p>
+          </p:txBody>
+        </p:sp>
+        <p:sp>
+          <p:nvSpPr>
+            <p:cNvPr id="14" name="Rectangle 13">
+              <a:extLst>
+                <a:ext uri="{FF2B5EF4-FFF2-40B4-BE49-F238E27FC236}">
+                  <a16:creationId xmlns:a16="http://schemas.microsoft.com/office/drawing/2014/main" id="{2A33E0DC-9787-1A44-8BCA-C0BE5917D443}"/>
+                </a:ext>
+              </a:extLst>
+            </p:cNvPr>
+            <p:cNvSpPr/>
+            <p:nvPr/>
+          </p:nvSpPr>
+          <p:spPr>
+            <a:xfrm>
+              <a:off x="2678377" y="1407992"/>
+              <a:ext cx="1589963" cy="586852"/>
+            </a:xfrm>
+            <a:prstGeom prst="rect">
+              <a:avLst/>
+            </a:prstGeom>
+            <a:noFill/>
+            <a:ln>
+              <a:solidFill>
+                <a:schemeClr val="tx1">
+                  <a:lumMod val="95000"/>
+                  <a:lumOff val="5000"/>
+                </a:schemeClr>
+              </a:solidFill>
+            </a:ln>
+          </p:spPr>
+          <p:style>
+            <a:lnRef idx="2">
+              <a:schemeClr val="accent1">
+                <a:shade val="50000"/>
+              </a:schemeClr>
+            </a:lnRef>
+            <a:fillRef idx="1">
+              <a:schemeClr val="accent1"/>
+            </a:fillRef>
+            <a:effectRef idx="0">
+              <a:schemeClr val="accent1"/>
+            </a:effectRef>
+            <a:fontRef idx="minor">
+              <a:schemeClr val="lt1"/>
+            </a:fontRef>
+          </p:style>
+          <p:txBody>
+            <a:bodyPr rtlCol="0" anchor="ctr"/>
+            <a:lstStyle/>
+            <a:p>
+              <a:pPr algn="ctr"/>
+              <a:r>
+                <a:rPr lang="en-US" dirty="0">
+                  <a:solidFill>
+                    <a:schemeClr val="tx1">
+                      <a:lumMod val="95000"/>
+                      <a:lumOff val="5000"/>
+                    </a:schemeClr>
+                  </a:solidFill>
+                </a:rPr>
+                <a:t>Understand the Business</a:t>
+              </a:r>
+              <a:endParaRPr lang="en-IN" dirty="0">
+                <a:solidFill>
+                  <a:schemeClr val="tx1">
+                    <a:lumMod val="95000"/>
+                    <a:lumOff val="5000"/>
+                  </a:schemeClr>
+                </a:solidFill>
+              </a:endParaRPr>
+            </a:p>
+          </p:txBody>
+        </p:sp>
+        <p:sp>
+          <p:nvSpPr>
+            <p:cNvPr id="15" name="Rectangle 14">
+              <a:extLst>
+                <a:ext uri="{FF2B5EF4-FFF2-40B4-BE49-F238E27FC236}">
+                  <a16:creationId xmlns:a16="http://schemas.microsoft.com/office/drawing/2014/main" id="{4E6827D2-72E1-5962-1CFB-B713879C799C}"/>
+                </a:ext>
+              </a:extLst>
+            </p:cNvPr>
+            <p:cNvSpPr/>
+            <p:nvPr/>
+          </p:nvSpPr>
+          <p:spPr>
+            <a:xfrm>
+              <a:off x="5401107" y="4727801"/>
+              <a:ext cx="1181658" cy="586852"/>
+            </a:xfrm>
+            <a:prstGeom prst="rect">
+              <a:avLst/>
+            </a:prstGeom>
+            <a:noFill/>
+            <a:ln>
+              <a:solidFill>
+                <a:schemeClr val="tx1">
+                  <a:lumMod val="95000"/>
+                  <a:lumOff val="5000"/>
+                </a:schemeClr>
+              </a:solidFill>
+            </a:ln>
+          </p:spPr>
+          <p:style>
+            <a:lnRef idx="2">
+              <a:schemeClr val="accent1">
+                <a:shade val="50000"/>
+              </a:schemeClr>
+            </a:lnRef>
+            <a:fillRef idx="1">
+              <a:schemeClr val="accent1"/>
+            </a:fillRef>
+            <a:effectRef idx="0">
+              <a:schemeClr val="accent1"/>
+            </a:effectRef>
+            <a:fontRef idx="minor">
+              <a:schemeClr val="lt1"/>
+            </a:fontRef>
+          </p:style>
+          <p:txBody>
+            <a:bodyPr rtlCol="0" anchor="ctr"/>
+            <a:lstStyle/>
+            <a:p>
+              <a:pPr algn="ctr"/>
+              <a:r>
+                <a:rPr lang="en-US" dirty="0">
+                  <a:solidFill>
+                    <a:schemeClr val="tx1">
+                      <a:lumMod val="95000"/>
+                      <a:lumOff val="5000"/>
+                    </a:schemeClr>
+                  </a:solidFill>
+                </a:rPr>
+                <a:t>Store Data</a:t>
+              </a:r>
+            </a:p>
+          </p:txBody>
+        </p:sp>
+        <p:sp>
+          <p:nvSpPr>
+            <p:cNvPr id="16" name="Rectangle 15">
+              <a:extLst>
+                <a:ext uri="{FF2B5EF4-FFF2-40B4-BE49-F238E27FC236}">
+                  <a16:creationId xmlns:a16="http://schemas.microsoft.com/office/drawing/2014/main" id="{BBE09295-69CD-9ABA-ADB3-6BAC1B7C34F5}"/>
+                </a:ext>
+              </a:extLst>
+            </p:cNvPr>
+            <p:cNvSpPr/>
+            <p:nvPr/>
+          </p:nvSpPr>
+          <p:spPr>
+            <a:xfrm>
+              <a:off x="1286305" y="3707626"/>
+              <a:ext cx="1392072" cy="586852"/>
+            </a:xfrm>
+            <a:prstGeom prst="rect">
+              <a:avLst/>
+            </a:prstGeom>
+            <a:noFill/>
+            <a:ln>
+              <a:solidFill>
+                <a:schemeClr val="tx1">
+                  <a:lumMod val="95000"/>
+                  <a:lumOff val="5000"/>
+                </a:schemeClr>
+              </a:solidFill>
+            </a:ln>
+          </p:spPr>
+          <p:style>
+            <a:lnRef idx="2">
+              <a:schemeClr val="accent1">
+                <a:shade val="50000"/>
+              </a:schemeClr>
+            </a:lnRef>
+            <a:fillRef idx="1">
+              <a:schemeClr val="accent1"/>
+            </a:fillRef>
+            <a:effectRef idx="0">
+              <a:schemeClr val="accent1"/>
+            </a:effectRef>
+            <a:fontRef idx="minor">
+              <a:schemeClr val="lt1"/>
+            </a:fontRef>
+          </p:style>
+          <p:txBody>
+            <a:bodyPr rtlCol="0" anchor="ctr"/>
+            <a:lstStyle/>
+            <a:p>
+              <a:pPr algn="ctr"/>
+              <a:r>
+                <a:rPr lang="en-US" dirty="0">
+                  <a:solidFill>
+                    <a:schemeClr val="tx1">
+                      <a:lumMod val="95000"/>
+                      <a:lumOff val="5000"/>
+                    </a:schemeClr>
+                  </a:solidFill>
+                </a:rPr>
+                <a:t>Feature Engineering</a:t>
+              </a:r>
+            </a:p>
+          </p:txBody>
+        </p:sp>
+        <p:sp>
+          <p:nvSpPr>
+            <p:cNvPr id="17" name="Rectangle 16">
+              <a:extLst>
+                <a:ext uri="{FF2B5EF4-FFF2-40B4-BE49-F238E27FC236}">
+                  <a16:creationId xmlns:a16="http://schemas.microsoft.com/office/drawing/2014/main" id="{3FD35EF8-D44B-D3F6-FB36-E6EC2C58FD6E}"/>
+                </a:ext>
+              </a:extLst>
+            </p:cNvPr>
+            <p:cNvSpPr/>
+            <p:nvPr/>
+          </p:nvSpPr>
+          <p:spPr>
+            <a:xfrm>
+              <a:off x="5401107" y="3707626"/>
+              <a:ext cx="1181658" cy="586852"/>
+            </a:xfrm>
+            <a:prstGeom prst="rect">
+              <a:avLst/>
+            </a:prstGeom>
+            <a:noFill/>
+            <a:ln>
+              <a:solidFill>
+                <a:schemeClr val="tx1">
+                  <a:lumMod val="95000"/>
+                  <a:lumOff val="5000"/>
+                </a:schemeClr>
+              </a:solidFill>
+            </a:ln>
+          </p:spPr>
+          <p:style>
+            <a:lnRef idx="2">
+              <a:schemeClr val="accent1">
+                <a:shade val="50000"/>
+              </a:schemeClr>
+            </a:lnRef>
+            <a:fillRef idx="1">
+              <a:schemeClr val="accent1"/>
+            </a:fillRef>
+            <a:effectRef idx="0">
+              <a:schemeClr val="accent1"/>
+            </a:effectRef>
+            <a:fontRef idx="minor">
+              <a:schemeClr val="lt1"/>
+            </a:fontRef>
+          </p:style>
+          <p:txBody>
+            <a:bodyPr rtlCol="0" anchor="ctr"/>
+            <a:lstStyle/>
+            <a:p>
+              <a:pPr algn="ctr"/>
+              <a:r>
+                <a:rPr lang="en-US" dirty="0">
+                  <a:solidFill>
+                    <a:schemeClr val="tx1">
+                      <a:lumMod val="95000"/>
+                      <a:lumOff val="5000"/>
+                    </a:schemeClr>
+                  </a:solidFill>
+                </a:rPr>
+                <a:t>Split Data</a:t>
+              </a:r>
+              <a:endParaRPr lang="en-IN" dirty="0">
+                <a:solidFill>
+                  <a:schemeClr val="tx1">
+                    <a:lumMod val="95000"/>
+                    <a:lumOff val="5000"/>
+                  </a:schemeClr>
+                </a:solidFill>
+              </a:endParaRPr>
+            </a:p>
+          </p:txBody>
+        </p:sp>
+        <p:sp>
+          <p:nvSpPr>
+            <p:cNvPr id="18" name="Rectangle 17">
+              <a:extLst>
+                <a:ext uri="{FF2B5EF4-FFF2-40B4-BE49-F238E27FC236}">
+                  <a16:creationId xmlns:a16="http://schemas.microsoft.com/office/drawing/2014/main" id="{4D36486D-938F-4C73-EFC0-57FB04CA6865}"/>
+                </a:ext>
+              </a:extLst>
+            </p:cNvPr>
+            <p:cNvSpPr/>
+            <p:nvPr/>
+          </p:nvSpPr>
+          <p:spPr>
+            <a:xfrm>
+              <a:off x="7149148" y="3707626"/>
+              <a:ext cx="1392072" cy="586852"/>
+            </a:xfrm>
+            <a:prstGeom prst="rect">
+              <a:avLst/>
+            </a:prstGeom>
+            <a:noFill/>
+            <a:ln>
+              <a:solidFill>
+                <a:schemeClr val="tx1">
+                  <a:lumMod val="95000"/>
+                  <a:lumOff val="5000"/>
+                </a:schemeClr>
+              </a:solidFill>
+            </a:ln>
+          </p:spPr>
+          <p:style>
+            <a:lnRef idx="2">
+              <a:schemeClr val="accent1">
+                <a:shade val="50000"/>
+              </a:schemeClr>
+            </a:lnRef>
+            <a:fillRef idx="1">
+              <a:schemeClr val="accent1"/>
+            </a:fillRef>
+            <a:effectRef idx="0">
+              <a:schemeClr val="accent1"/>
+            </a:effectRef>
+            <a:fontRef idx="minor">
+              <a:schemeClr val="lt1"/>
+            </a:fontRef>
+          </p:style>
+          <p:txBody>
+            <a:bodyPr rtlCol="0" anchor="ctr"/>
+            <a:lstStyle/>
+            <a:p>
+              <a:pPr algn="ctr"/>
+              <a:r>
+                <a:rPr lang="en-US" dirty="0">
+                  <a:solidFill>
+                    <a:schemeClr val="tx1">
+                      <a:lumMod val="95000"/>
+                      <a:lumOff val="5000"/>
+                    </a:schemeClr>
+                  </a:solidFill>
+                </a:rPr>
+                <a:t>Model Training</a:t>
+              </a:r>
+              <a:endParaRPr lang="en-IN" dirty="0">
+                <a:solidFill>
+                  <a:schemeClr val="tx1">
+                    <a:lumMod val="95000"/>
+                    <a:lumOff val="5000"/>
+                  </a:schemeClr>
+                </a:solidFill>
+              </a:endParaRPr>
+            </a:p>
+          </p:txBody>
+        </p:sp>
+        <p:sp>
+          <p:nvSpPr>
+            <p:cNvPr id="19" name="Rectangle 18">
+              <a:extLst>
+                <a:ext uri="{FF2B5EF4-FFF2-40B4-BE49-F238E27FC236}">
+                  <a16:creationId xmlns:a16="http://schemas.microsoft.com/office/drawing/2014/main" id="{754C3893-6C2C-F14A-F6F7-532B545345D8}"/>
+                </a:ext>
+              </a:extLst>
+            </p:cNvPr>
+            <p:cNvSpPr/>
+            <p:nvPr/>
+          </p:nvSpPr>
+          <p:spPr>
+            <a:xfrm>
+              <a:off x="9107604" y="3713302"/>
+              <a:ext cx="1392072" cy="586852"/>
+            </a:xfrm>
+            <a:prstGeom prst="rect">
+              <a:avLst/>
+            </a:prstGeom>
+            <a:noFill/>
+            <a:ln>
+              <a:solidFill>
+                <a:schemeClr val="tx1">
+                  <a:lumMod val="95000"/>
+                  <a:lumOff val="5000"/>
+                </a:schemeClr>
+              </a:solidFill>
+            </a:ln>
+          </p:spPr>
+          <p:style>
+            <a:lnRef idx="2">
+              <a:schemeClr val="accent1">
+                <a:shade val="50000"/>
+              </a:schemeClr>
+            </a:lnRef>
+            <a:fillRef idx="1">
+              <a:schemeClr val="accent1"/>
+            </a:fillRef>
+            <a:effectRef idx="0">
+              <a:schemeClr val="accent1"/>
+            </a:effectRef>
+            <a:fontRef idx="minor">
+              <a:schemeClr val="lt1"/>
+            </a:fontRef>
+          </p:style>
+          <p:txBody>
+            <a:bodyPr rtlCol="0" anchor="ctr"/>
+            <a:lstStyle/>
+            <a:p>
+              <a:pPr algn="ctr"/>
+              <a:r>
+                <a:rPr lang="en-US" dirty="0">
+                  <a:solidFill>
+                    <a:schemeClr val="tx1">
+                      <a:lumMod val="95000"/>
+                      <a:lumOff val="5000"/>
+                    </a:schemeClr>
+                  </a:solidFill>
+                </a:rPr>
+                <a:t>Model Evaluation</a:t>
+              </a:r>
+              <a:endParaRPr lang="en-IN" dirty="0">
+                <a:solidFill>
+                  <a:schemeClr val="tx1">
+                    <a:lumMod val="95000"/>
+                    <a:lumOff val="5000"/>
+                  </a:schemeClr>
+                </a:solidFill>
+              </a:endParaRPr>
+            </a:p>
+          </p:txBody>
+        </p:sp>
+        <p:sp>
+          <p:nvSpPr>
+            <p:cNvPr id="20" name="Rectangle 19">
+              <a:extLst>
+                <a:ext uri="{FF2B5EF4-FFF2-40B4-BE49-F238E27FC236}">
+                  <a16:creationId xmlns:a16="http://schemas.microsoft.com/office/drawing/2014/main" id="{F05E3A68-705A-0244-577C-44661198A61A}"/>
+                </a:ext>
+              </a:extLst>
+            </p:cNvPr>
+            <p:cNvSpPr/>
+            <p:nvPr/>
+          </p:nvSpPr>
+          <p:spPr>
+            <a:xfrm>
+              <a:off x="9107605" y="5314653"/>
+              <a:ext cx="1392071" cy="586852"/>
+            </a:xfrm>
+            <a:prstGeom prst="rect">
+              <a:avLst/>
+            </a:prstGeom>
+            <a:noFill/>
+            <a:ln>
+              <a:solidFill>
+                <a:schemeClr val="tx1">
+                  <a:lumMod val="95000"/>
+                  <a:lumOff val="5000"/>
+                </a:schemeClr>
+              </a:solidFill>
+            </a:ln>
+          </p:spPr>
+          <p:style>
+            <a:lnRef idx="2">
+              <a:schemeClr val="accent1">
+                <a:shade val="50000"/>
+              </a:schemeClr>
+            </a:lnRef>
+            <a:fillRef idx="1">
+              <a:schemeClr val="accent1"/>
+            </a:fillRef>
+            <a:effectRef idx="0">
+              <a:schemeClr val="accent1"/>
+            </a:effectRef>
+            <a:fontRef idx="minor">
+              <a:schemeClr val="lt1"/>
+            </a:fontRef>
+          </p:style>
+          <p:txBody>
+            <a:bodyPr rtlCol="0" anchor="ctr"/>
+            <a:lstStyle/>
+            <a:p>
+              <a:pPr algn="ctr"/>
+              <a:r>
+                <a:rPr lang="en-US" dirty="0">
+                  <a:solidFill>
+                    <a:schemeClr val="tx1">
+                      <a:lumMod val="95000"/>
+                      <a:lumOff val="5000"/>
+                    </a:schemeClr>
+                  </a:solidFill>
+                </a:rPr>
+                <a:t>Prediction</a:t>
+              </a:r>
+              <a:endParaRPr lang="en-IN" dirty="0">
+                <a:solidFill>
+                  <a:schemeClr val="tx1">
+                    <a:lumMod val="95000"/>
+                    <a:lumOff val="5000"/>
+                  </a:schemeClr>
+                </a:solidFill>
+              </a:endParaRPr>
+            </a:p>
+          </p:txBody>
+        </p:sp>
+        <p:sp>
+          <p:nvSpPr>
+            <p:cNvPr id="21" name="Rectangle 20">
+              <a:extLst>
+                <a:ext uri="{FF2B5EF4-FFF2-40B4-BE49-F238E27FC236}">
+                  <a16:creationId xmlns:a16="http://schemas.microsoft.com/office/drawing/2014/main" id="{886DA854-72CD-4182-E00C-96D9A977C0F6}"/>
+                </a:ext>
+              </a:extLst>
+            </p:cNvPr>
+            <p:cNvSpPr/>
+            <p:nvPr/>
+          </p:nvSpPr>
+          <p:spPr>
+            <a:xfrm rot="16200000">
+              <a:off x="7357243" y="4532707"/>
+              <a:ext cx="721074" cy="286661"/>
+            </a:xfrm>
+            <a:prstGeom prst="rect">
+              <a:avLst/>
+            </a:prstGeom>
+            <a:noFill/>
+            <a:ln>
+              <a:noFill/>
+            </a:ln>
+          </p:spPr>
+          <p:style>
+            <a:lnRef idx="2">
+              <a:schemeClr val="accent1">
+                <a:shade val="50000"/>
+              </a:schemeClr>
+            </a:lnRef>
+            <a:fillRef idx="1">
+              <a:schemeClr val="accent1"/>
+            </a:fillRef>
+            <a:effectRef idx="0">
+              <a:schemeClr val="accent1"/>
+            </a:effectRef>
+            <a:fontRef idx="minor">
+              <a:schemeClr val="lt1"/>
+            </a:fontRef>
+          </p:style>
+          <p:txBody>
+            <a:bodyPr rtlCol="0" anchor="ctr"/>
+            <a:lstStyle/>
+            <a:p>
+              <a:pPr algn="ctr"/>
+              <a:r>
+                <a:rPr lang="en-US" sz="1400" spc="300" dirty="0">
+                  <a:solidFill>
+                    <a:schemeClr val="tx1">
+                      <a:lumMod val="95000"/>
+                      <a:lumOff val="5000"/>
+                    </a:schemeClr>
+                  </a:solidFill>
+                </a:rPr>
+                <a:t>train</a:t>
+              </a:r>
+              <a:endParaRPr lang="en-IN" sz="1400" spc="300" dirty="0">
+                <a:solidFill>
+                  <a:schemeClr val="tx1">
+                    <a:lumMod val="95000"/>
+                    <a:lumOff val="5000"/>
+                  </a:schemeClr>
+                </a:solidFill>
+              </a:endParaRPr>
+            </a:p>
+          </p:txBody>
+        </p:sp>
+        <p:sp>
+          <p:nvSpPr>
+            <p:cNvPr id="22" name="Rectangle 21">
+              <a:extLst>
+                <a:ext uri="{FF2B5EF4-FFF2-40B4-BE49-F238E27FC236}">
+                  <a16:creationId xmlns:a16="http://schemas.microsoft.com/office/drawing/2014/main" id="{2515D698-445D-12F8-2C09-4F0D0CFB0822}"/>
+                </a:ext>
+              </a:extLst>
+            </p:cNvPr>
+            <p:cNvSpPr/>
+            <p:nvPr/>
+          </p:nvSpPr>
+          <p:spPr>
+            <a:xfrm>
+              <a:off x="9202370" y="4772704"/>
+              <a:ext cx="670635" cy="250223"/>
+            </a:xfrm>
+            <a:prstGeom prst="rect">
+              <a:avLst/>
+            </a:prstGeom>
+            <a:noFill/>
+            <a:ln>
+              <a:noFill/>
+            </a:ln>
+          </p:spPr>
+          <p:style>
+            <a:lnRef idx="2">
+              <a:schemeClr val="accent1">
+                <a:shade val="50000"/>
+              </a:schemeClr>
+            </a:lnRef>
+            <a:fillRef idx="1">
+              <a:schemeClr val="accent1"/>
+            </a:fillRef>
+            <a:effectRef idx="0">
+              <a:schemeClr val="accent1"/>
+            </a:effectRef>
+            <a:fontRef idx="minor">
+              <a:schemeClr val="lt1"/>
+            </a:fontRef>
+          </p:style>
+          <p:txBody>
+            <a:bodyPr rtlCol="0" anchor="ctr"/>
+            <a:lstStyle/>
+            <a:p>
+              <a:pPr algn="ctr"/>
+              <a:r>
+                <a:rPr lang="en-US" sz="1400" spc="300" dirty="0">
+                  <a:solidFill>
+                    <a:schemeClr val="tx1">
+                      <a:lumMod val="95000"/>
+                      <a:lumOff val="5000"/>
+                    </a:schemeClr>
+                  </a:solidFill>
+                </a:rPr>
+                <a:t>test</a:t>
+              </a:r>
+              <a:endParaRPr lang="en-IN" sz="1400" spc="300" dirty="0">
+                <a:solidFill>
+                  <a:schemeClr val="tx1">
+                    <a:lumMod val="95000"/>
+                    <a:lumOff val="5000"/>
+                  </a:schemeClr>
+                </a:solidFill>
+              </a:endParaRPr>
+            </a:p>
+          </p:txBody>
+        </p:sp>
+        <p:cxnSp>
+          <p:nvCxnSpPr>
+            <p:cNvPr id="24" name="Straight Arrow Connector 23">
+              <a:extLst>
+                <a:ext uri="{FF2B5EF4-FFF2-40B4-BE49-F238E27FC236}">
+                  <a16:creationId xmlns:a16="http://schemas.microsoft.com/office/drawing/2014/main" id="{0FF7FA01-B9C4-7E40-5343-EC850F7560EB}"/>
+                </a:ext>
+              </a:extLst>
+            </p:cNvPr>
+            <p:cNvCxnSpPr>
+              <a:stCxn id="3" idx="2"/>
+              <a:endCxn id="13" idx="0"/>
+            </p:cNvCxnSpPr>
+            <p:nvPr/>
+          </p:nvCxnSpPr>
+          <p:spPr>
+            <a:xfrm>
+              <a:off x="1471684" y="1885663"/>
+              <a:ext cx="0" cy="678970"/>
+            </a:xfrm>
+            <a:prstGeom prst="straightConnector1">
+              <a:avLst/>
+            </a:prstGeom>
+            <a:ln w="28575">
+              <a:tailEnd type="triangle"/>
+            </a:ln>
+          </p:spPr>
+          <p:style>
+            <a:lnRef idx="2">
+              <a:schemeClr val="accent2"/>
+            </a:lnRef>
+            <a:fillRef idx="0">
+              <a:schemeClr val="accent2"/>
+            </a:fillRef>
+            <a:effectRef idx="1">
+              <a:schemeClr val="accent2"/>
+            </a:effectRef>
+            <a:fontRef idx="minor">
+              <a:schemeClr val="tx1"/>
+            </a:fontRef>
+          </p:style>
+        </p:cxnSp>
+        <p:cxnSp>
+          <p:nvCxnSpPr>
+            <p:cNvPr id="26" name="Connector: Elbow 25">
+              <a:extLst>
+                <a:ext uri="{FF2B5EF4-FFF2-40B4-BE49-F238E27FC236}">
+                  <a16:creationId xmlns:a16="http://schemas.microsoft.com/office/drawing/2014/main" id="{595BB4D2-901D-53AF-CCD0-7E56FC7D1251}"/>
+                </a:ext>
+              </a:extLst>
+            </p:cNvPr>
+            <p:cNvCxnSpPr>
+              <a:stCxn id="14" idx="2"/>
+              <a:endCxn id="13" idx="3"/>
+            </p:cNvCxnSpPr>
+            <p:nvPr/>
+          </p:nvCxnSpPr>
+          <p:spPr>
+            <a:xfrm rot="5400000">
+              <a:off x="2482192" y="1805477"/>
+              <a:ext cx="801801" cy="1180535"/>
+            </a:xfrm>
+            <a:prstGeom prst="bentConnector2">
+              <a:avLst/>
+            </a:prstGeom>
+            <a:ln w="28575">
+              <a:tailEnd type="triangle"/>
+            </a:ln>
+          </p:spPr>
+          <p:style>
+            <a:lnRef idx="2">
+              <a:schemeClr val="accent2"/>
+            </a:lnRef>
+            <a:fillRef idx="0">
+              <a:schemeClr val="accent2"/>
+            </a:fillRef>
+            <a:effectRef idx="1">
+              <a:schemeClr val="accent2"/>
+            </a:effectRef>
+            <a:fontRef idx="minor">
+              <a:schemeClr val="tx1"/>
+            </a:fontRef>
+          </p:style>
+        </p:cxnSp>
+        <p:cxnSp>
+          <p:nvCxnSpPr>
+            <p:cNvPr id="28" name="Connector: Elbow 27">
+              <a:extLst>
+                <a:ext uri="{FF2B5EF4-FFF2-40B4-BE49-F238E27FC236}">
+                  <a16:creationId xmlns:a16="http://schemas.microsoft.com/office/drawing/2014/main" id="{E97D795F-CD00-417C-A2A5-FCC00EDD6C5F}"/>
+                </a:ext>
+              </a:extLst>
+            </p:cNvPr>
+            <p:cNvCxnSpPr>
+              <a:stCxn id="13" idx="2"/>
+              <a:endCxn id="16" idx="1"/>
+            </p:cNvCxnSpPr>
+            <p:nvPr/>
+          </p:nvCxnSpPr>
+          <p:spPr>
+            <a:xfrm rot="5400000">
+              <a:off x="892797" y="3422165"/>
+              <a:ext cx="972396" cy="185379"/>
+            </a:xfrm>
+            <a:prstGeom prst="bentConnector4">
+              <a:avLst>
+                <a:gd name="adj1" fmla="val 34912"/>
+                <a:gd name="adj2" fmla="val 223315"/>
+              </a:avLst>
+            </a:prstGeom>
+            <a:ln w="28575">
+              <a:tailEnd type="triangle"/>
+            </a:ln>
+          </p:spPr>
+          <p:style>
+            <a:lnRef idx="2">
+              <a:schemeClr val="accent2"/>
+            </a:lnRef>
+            <a:fillRef idx="0">
+              <a:schemeClr val="accent2"/>
+            </a:fillRef>
+            <a:effectRef idx="1">
+              <a:schemeClr val="accent2"/>
+            </a:effectRef>
+            <a:fontRef idx="minor">
+              <a:schemeClr val="tx1"/>
+            </a:fontRef>
+          </p:style>
+        </p:cxnSp>
+        <p:cxnSp>
+          <p:nvCxnSpPr>
+            <p:cNvPr id="30" name="Straight Arrow Connector 29">
+              <a:extLst>
+                <a:ext uri="{FF2B5EF4-FFF2-40B4-BE49-F238E27FC236}">
+                  <a16:creationId xmlns:a16="http://schemas.microsoft.com/office/drawing/2014/main" id="{96AC9182-5C6B-8EFD-4D10-FD26CDD48B0A}"/>
+                </a:ext>
+              </a:extLst>
+            </p:cNvPr>
+            <p:cNvCxnSpPr>
+              <a:stCxn id="16" idx="3"/>
+              <a:endCxn id="7" idx="1"/>
+            </p:cNvCxnSpPr>
+            <p:nvPr/>
+          </p:nvCxnSpPr>
+          <p:spPr>
+            <a:xfrm>
+              <a:off x="2678377" y="4001052"/>
+              <a:ext cx="566383" cy="0"/>
+            </a:xfrm>
+            <a:prstGeom prst="straightConnector1">
+              <a:avLst/>
+            </a:prstGeom>
+            <a:ln w="28575">
+              <a:tailEnd type="triangle"/>
+            </a:ln>
+          </p:spPr>
+          <p:style>
+            <a:lnRef idx="2">
+              <a:schemeClr val="accent2"/>
+            </a:lnRef>
+            <a:fillRef idx="0">
+              <a:schemeClr val="accent2"/>
+            </a:fillRef>
+            <a:effectRef idx="1">
+              <a:schemeClr val="accent2"/>
+            </a:effectRef>
+            <a:fontRef idx="minor">
+              <a:schemeClr val="tx1"/>
+            </a:fontRef>
+          </p:style>
+        </p:cxnSp>
+        <p:cxnSp>
+          <p:nvCxnSpPr>
+            <p:cNvPr id="32" name="Straight Arrow Connector 31">
+              <a:extLst>
+                <a:ext uri="{FF2B5EF4-FFF2-40B4-BE49-F238E27FC236}">
+                  <a16:creationId xmlns:a16="http://schemas.microsoft.com/office/drawing/2014/main" id="{55007268-A7C1-91B4-50FA-17A0B173C0A5}"/>
+                </a:ext>
+              </a:extLst>
+            </p:cNvPr>
+            <p:cNvCxnSpPr>
+              <a:stCxn id="7" idx="3"/>
+              <a:endCxn id="17" idx="1"/>
+            </p:cNvCxnSpPr>
+            <p:nvPr/>
+          </p:nvCxnSpPr>
+          <p:spPr>
+            <a:xfrm>
+              <a:off x="4834723" y="4001052"/>
+              <a:ext cx="566384" cy="0"/>
+            </a:xfrm>
+            <a:prstGeom prst="straightConnector1">
+              <a:avLst/>
+            </a:prstGeom>
+            <a:ln w="28575">
+              <a:tailEnd type="triangle"/>
+            </a:ln>
+          </p:spPr>
+          <p:style>
+            <a:lnRef idx="2">
+              <a:schemeClr val="accent2"/>
+            </a:lnRef>
+            <a:fillRef idx="0">
+              <a:schemeClr val="accent2"/>
+            </a:fillRef>
+            <a:effectRef idx="1">
+              <a:schemeClr val="accent2"/>
+            </a:effectRef>
+            <a:fontRef idx="minor">
+              <a:schemeClr val="tx1"/>
+            </a:fontRef>
+          </p:style>
+        </p:cxnSp>
+        <p:cxnSp>
+          <p:nvCxnSpPr>
+            <p:cNvPr id="36" name="Straight Arrow Connector 35">
+              <a:extLst>
+                <a:ext uri="{FF2B5EF4-FFF2-40B4-BE49-F238E27FC236}">
+                  <a16:creationId xmlns:a16="http://schemas.microsoft.com/office/drawing/2014/main" id="{F17DD497-5B08-4EBC-2658-57F2C07C30B5}"/>
+                </a:ext>
+              </a:extLst>
+            </p:cNvPr>
+            <p:cNvCxnSpPr>
+              <a:stCxn id="17" idx="2"/>
+              <a:endCxn id="15" idx="0"/>
+            </p:cNvCxnSpPr>
+            <p:nvPr/>
+          </p:nvCxnSpPr>
+          <p:spPr>
+            <a:xfrm>
+              <a:off x="5991936" y="4294478"/>
+              <a:ext cx="0" cy="433323"/>
+            </a:xfrm>
+            <a:prstGeom prst="straightConnector1">
+              <a:avLst/>
+            </a:prstGeom>
+            <a:ln w="28575">
+              <a:tailEnd type="triangle"/>
+            </a:ln>
+          </p:spPr>
+          <p:style>
+            <a:lnRef idx="2">
+              <a:schemeClr val="accent2"/>
+            </a:lnRef>
+            <a:fillRef idx="0">
+              <a:schemeClr val="accent2"/>
+            </a:fillRef>
+            <a:effectRef idx="1">
+              <a:schemeClr val="accent2"/>
+            </a:effectRef>
+            <a:fontRef idx="minor">
+              <a:schemeClr val="tx1"/>
+            </a:fontRef>
+          </p:style>
+        </p:cxnSp>
+        <p:cxnSp>
+          <p:nvCxnSpPr>
+            <p:cNvPr id="40" name="Connector: Elbow 39">
+              <a:extLst>
+                <a:ext uri="{FF2B5EF4-FFF2-40B4-BE49-F238E27FC236}">
+                  <a16:creationId xmlns:a16="http://schemas.microsoft.com/office/drawing/2014/main" id="{74DED20C-C007-534F-A915-23DAB6715961}"/>
+                </a:ext>
+              </a:extLst>
+            </p:cNvPr>
+            <p:cNvCxnSpPr>
+              <a:stCxn id="15" idx="3"/>
+              <a:endCxn id="18" idx="2"/>
+            </p:cNvCxnSpPr>
+            <p:nvPr/>
+          </p:nvCxnSpPr>
+          <p:spPr>
+            <a:xfrm flipV="1">
+              <a:off x="6582765" y="4294478"/>
+              <a:ext cx="1262419" cy="726749"/>
+            </a:xfrm>
+            <a:prstGeom prst="bentConnector2">
+              <a:avLst/>
+            </a:prstGeom>
+            <a:ln w="28575">
+              <a:tailEnd type="triangle"/>
+            </a:ln>
+          </p:spPr>
+          <p:style>
+            <a:lnRef idx="2">
+              <a:schemeClr val="accent2"/>
+            </a:lnRef>
+            <a:fillRef idx="0">
+              <a:schemeClr val="accent2"/>
+            </a:fillRef>
+            <a:effectRef idx="1">
+              <a:schemeClr val="accent2"/>
+            </a:effectRef>
+            <a:fontRef idx="minor">
+              <a:schemeClr val="tx1"/>
+            </a:fontRef>
+          </p:style>
+        </p:cxnSp>
+        <p:cxnSp>
+          <p:nvCxnSpPr>
+            <p:cNvPr id="42" name="Connector: Elbow 41">
+              <a:extLst>
+                <a:ext uri="{FF2B5EF4-FFF2-40B4-BE49-F238E27FC236}">
+                  <a16:creationId xmlns:a16="http://schemas.microsoft.com/office/drawing/2014/main" id="{B3F818DC-8EE0-0F58-41D6-A67B2A4ECA47}"/>
+                </a:ext>
+              </a:extLst>
+            </p:cNvPr>
+            <p:cNvCxnSpPr>
+              <a:stCxn id="15" idx="3"/>
+              <a:endCxn id="19" idx="2"/>
+            </p:cNvCxnSpPr>
+            <p:nvPr/>
+          </p:nvCxnSpPr>
+          <p:spPr>
+            <a:xfrm flipV="1">
+              <a:off x="6582765" y="4300154"/>
+              <a:ext cx="3220875" cy="721073"/>
+            </a:xfrm>
+            <a:prstGeom prst="bentConnector2">
+              <a:avLst/>
+            </a:prstGeom>
+            <a:ln w="28575">
+              <a:tailEnd type="triangle"/>
+            </a:ln>
+          </p:spPr>
+          <p:style>
+            <a:lnRef idx="2">
+              <a:schemeClr val="accent2"/>
+            </a:lnRef>
+            <a:fillRef idx="0">
+              <a:schemeClr val="accent2"/>
+            </a:fillRef>
+            <a:effectRef idx="1">
+              <a:schemeClr val="accent2"/>
+            </a:effectRef>
+            <a:fontRef idx="minor">
+              <a:schemeClr val="tx1"/>
+            </a:fontRef>
+          </p:style>
+        </p:cxnSp>
+        <p:cxnSp>
+          <p:nvCxnSpPr>
+            <p:cNvPr id="44" name="Straight Arrow Connector 43">
+              <a:extLst>
+                <a:ext uri="{FF2B5EF4-FFF2-40B4-BE49-F238E27FC236}">
+                  <a16:creationId xmlns:a16="http://schemas.microsoft.com/office/drawing/2014/main" id="{8DFA15E6-E2A0-0F4A-8767-71884AA88903}"/>
+                </a:ext>
+              </a:extLst>
+            </p:cNvPr>
+            <p:cNvCxnSpPr>
+              <a:stCxn id="17" idx="3"/>
+              <a:endCxn id="18" idx="1"/>
+            </p:cNvCxnSpPr>
+            <p:nvPr/>
+          </p:nvCxnSpPr>
+          <p:spPr>
+            <a:xfrm>
+              <a:off x="6582765" y="4001052"/>
+              <a:ext cx="566383" cy="0"/>
+            </a:xfrm>
+            <a:prstGeom prst="straightConnector1">
+              <a:avLst/>
+            </a:prstGeom>
+            <a:ln w="28575">
+              <a:tailEnd type="triangle"/>
+            </a:ln>
+          </p:spPr>
+          <p:style>
+            <a:lnRef idx="2">
+              <a:schemeClr val="accent2"/>
+            </a:lnRef>
+            <a:fillRef idx="0">
+              <a:schemeClr val="accent2"/>
+            </a:fillRef>
+            <a:effectRef idx="1">
+              <a:schemeClr val="accent2"/>
+            </a:effectRef>
+            <a:fontRef idx="minor">
+              <a:schemeClr val="tx1"/>
+            </a:fontRef>
+          </p:style>
+        </p:cxnSp>
+        <p:cxnSp>
+          <p:nvCxnSpPr>
+            <p:cNvPr id="46" name="Straight Arrow Connector 45">
+              <a:extLst>
+                <a:ext uri="{FF2B5EF4-FFF2-40B4-BE49-F238E27FC236}">
+                  <a16:creationId xmlns:a16="http://schemas.microsoft.com/office/drawing/2014/main" id="{8302CBEE-D701-088B-CF19-813C68D892D8}"/>
+                </a:ext>
+              </a:extLst>
+            </p:cNvPr>
+            <p:cNvCxnSpPr>
+              <a:stCxn id="18" idx="3"/>
+              <a:endCxn id="19" idx="1"/>
+            </p:cNvCxnSpPr>
+            <p:nvPr/>
+          </p:nvCxnSpPr>
+          <p:spPr>
+            <a:xfrm>
+              <a:off x="8541220" y="4001052"/>
+              <a:ext cx="566384" cy="5676"/>
+            </a:xfrm>
+            <a:prstGeom prst="straightConnector1">
+              <a:avLst/>
+            </a:prstGeom>
+            <a:ln w="28575">
+              <a:tailEnd type="triangle"/>
+            </a:ln>
+          </p:spPr>
+          <p:style>
+            <a:lnRef idx="2">
+              <a:schemeClr val="accent2"/>
+            </a:lnRef>
+            <a:fillRef idx="0">
+              <a:schemeClr val="accent2"/>
+            </a:fillRef>
+            <a:effectRef idx="1">
+              <a:schemeClr val="accent2"/>
+            </a:effectRef>
+            <a:fontRef idx="minor">
+              <a:schemeClr val="tx1"/>
+            </a:fontRef>
+          </p:style>
+        </p:cxnSp>
+        <p:cxnSp>
+          <p:nvCxnSpPr>
+            <p:cNvPr id="48" name="Connector: Elbow 47">
+              <a:extLst>
+                <a:ext uri="{FF2B5EF4-FFF2-40B4-BE49-F238E27FC236}">
+                  <a16:creationId xmlns:a16="http://schemas.microsoft.com/office/drawing/2014/main" id="{3BE9837A-2E79-44FD-531B-2D48F3BBD732}"/>
+                </a:ext>
+              </a:extLst>
+            </p:cNvPr>
+            <p:cNvCxnSpPr>
+              <a:stCxn id="19" idx="3"/>
+              <a:endCxn id="20" idx="3"/>
+            </p:cNvCxnSpPr>
+            <p:nvPr/>
+          </p:nvCxnSpPr>
+          <p:spPr>
+            <a:xfrm>
+              <a:off x="10499676" y="4006728"/>
+              <a:ext cx="12700" cy="1601351"/>
+            </a:xfrm>
+            <a:prstGeom prst="bentConnector3">
+              <a:avLst>
+                <a:gd name="adj1" fmla="val 1800000"/>
+              </a:avLst>
+            </a:prstGeom>
+            <a:ln w="28575">
+              <a:tailEnd type="triangle"/>
+            </a:ln>
+          </p:spPr>
+          <p:style>
+            <a:lnRef idx="2">
+              <a:schemeClr val="accent2"/>
+            </a:lnRef>
+            <a:fillRef idx="0">
+              <a:schemeClr val="accent2"/>
+            </a:fillRef>
+            <a:effectRef idx="1">
+              <a:schemeClr val="accent2"/>
+            </a:effectRef>
+            <a:fontRef idx="minor">
+              <a:schemeClr val="tx1"/>
+            </a:fontRef>
+          </p:style>
+        </p:cxnSp>
+        <p:cxnSp>
+          <p:nvCxnSpPr>
+            <p:cNvPr id="63" name="Connector: Elbow 62">
+              <a:extLst>
+                <a:ext uri="{FF2B5EF4-FFF2-40B4-BE49-F238E27FC236}">
+                  <a16:creationId xmlns:a16="http://schemas.microsoft.com/office/drawing/2014/main" id="{C3CEB574-26A6-B562-90D7-4C80FBB1237F}"/>
+                </a:ext>
+              </a:extLst>
+            </p:cNvPr>
+            <p:cNvCxnSpPr>
+              <a:cxnSpLocks/>
+              <a:stCxn id="19" idx="0"/>
+            </p:cNvCxnSpPr>
+            <p:nvPr/>
+          </p:nvCxnSpPr>
+          <p:spPr>
+            <a:xfrm rot="16200000" flipV="1">
+              <a:off x="5645070" y="-445269"/>
+              <a:ext cx="806326" cy="7510815"/>
+            </a:xfrm>
+            <a:prstGeom prst="bentConnector2">
+              <a:avLst/>
+            </a:prstGeom>
+            <a:ln w="28575">
+              <a:tailEnd type="triangle"/>
+            </a:ln>
+          </p:spPr>
+          <p:style>
+            <a:lnRef idx="2">
+              <a:schemeClr val="accent2"/>
+            </a:lnRef>
+            <a:fillRef idx="0">
+              <a:schemeClr val="accent2"/>
+            </a:fillRef>
+            <a:effectRef idx="1">
+              <a:schemeClr val="accent2"/>
+            </a:effectRef>
+            <a:fontRef idx="minor">
+              <a:schemeClr val="tx1"/>
+            </a:fontRef>
+          </p:style>
+        </p:cxnSp>
+        <p:sp>
+          <p:nvSpPr>
+            <p:cNvPr id="67" name="Rectangle 66">
+              <a:extLst>
+                <a:ext uri="{FF2B5EF4-FFF2-40B4-BE49-F238E27FC236}">
+                  <a16:creationId xmlns:a16="http://schemas.microsoft.com/office/drawing/2014/main" id="{FC659846-2B34-065A-B8C9-DCD0A6E5B9D0}"/>
+                </a:ext>
+              </a:extLst>
+            </p:cNvPr>
+            <p:cNvSpPr/>
+            <p:nvPr/>
+          </p:nvSpPr>
+          <p:spPr>
+            <a:xfrm>
+              <a:off x="9839960" y="3225385"/>
+              <a:ext cx="1147813" cy="289470"/>
+            </a:xfrm>
+            <a:prstGeom prst="rect">
+              <a:avLst/>
+            </a:prstGeom>
+            <a:noFill/>
+            <a:ln>
+              <a:noFill/>
+            </a:ln>
+          </p:spPr>
+          <p:style>
+            <a:lnRef idx="2">
+              <a:schemeClr val="accent1">
+                <a:shade val="50000"/>
+              </a:schemeClr>
+            </a:lnRef>
+            <a:fillRef idx="1">
+              <a:schemeClr val="accent1"/>
+            </a:fillRef>
+            <a:effectRef idx="0">
+              <a:schemeClr val="accent1"/>
+            </a:effectRef>
+            <a:fontRef idx="minor">
+              <a:schemeClr val="lt1"/>
+            </a:fontRef>
+          </p:style>
+          <p:txBody>
+            <a:bodyPr rtlCol="0" anchor="ctr"/>
+            <a:lstStyle/>
+            <a:p>
+              <a:pPr algn="r"/>
+              <a:r>
+                <a:rPr lang="en-US" sz="1600" dirty="0">
+                  <a:solidFill>
+                    <a:schemeClr val="tx1">
+                      <a:lumMod val="95000"/>
+                      <a:lumOff val="5000"/>
+                    </a:schemeClr>
+                  </a:solidFill>
+                </a:rPr>
+                <a:t>ML Pipeline</a:t>
+              </a:r>
+              <a:endParaRPr lang="en-IN" sz="1600" dirty="0">
+                <a:solidFill>
+                  <a:schemeClr val="tx1">
+                    <a:lumMod val="95000"/>
+                    <a:lumOff val="5000"/>
+                  </a:schemeClr>
+                </a:solidFill>
+              </a:endParaRPr>
+            </a:p>
+          </p:txBody>
+        </p:sp>
+      </p:grpSp>
+    </p:spTree>
+    <p:extLst>
+      <p:ext uri="{BB962C8B-B14F-4D97-AF65-F5344CB8AC3E}">
+        <p14:creationId xmlns:p14="http://schemas.microsoft.com/office/powerpoint/2010/main" val="3007605235"/>
+      </p:ext>
+    </p:extLst>
+  </p:cSld>
+  <p:clrMapOvr>
+    <a:masterClrMapping/>
+  </p:clrMapOvr>
+</p:sld>
+</file>
+
+<file path=ppt/slides/slide9.xml><?xml version="1.0" encoding="utf-8"?>
 <p:sld xmlns:a="http://schemas.openxmlformats.org/drawingml/2006/main" xmlns:r="http://schemas.openxmlformats.org/officeDocument/2006/relationships" xmlns:p="http://schemas.openxmlformats.org/presentationml/2006/main">
   <p:cSld>
     <p:spTree>
@@ -6573,7 +10151,7 @@
                   </a:schemeClr>
                 </a:solidFill>
               </a:rPr>
-              <a:t>Build  Machine Learning Model for Prediction:</a:t>
+              <a:t>Generalized Machine Learning Model:</a:t>
             </a:r>
           </a:p>
         </p:txBody>
@@ -6618,174 +10196,6 @@
     <p:extLst>
       <p:ext uri="{BB962C8B-B14F-4D97-AF65-F5344CB8AC3E}">
         <p14:creationId xmlns:p14="http://schemas.microsoft.com/office/powerpoint/2010/main" val="2817202501"/>
-      </p:ext>
-    </p:extLst>
-  </p:cSld>
-  <p:clrMapOvr>
-    <a:masterClrMapping/>
-  </p:clrMapOvr>
-</p:sld>
-</file>
-
-<file path=ppt/slides/slide8.xml><?xml version="1.0" encoding="utf-8"?>
-<p:sld xmlns:a="http://schemas.openxmlformats.org/drawingml/2006/main" xmlns:r="http://schemas.openxmlformats.org/officeDocument/2006/relationships" xmlns:p="http://schemas.openxmlformats.org/presentationml/2006/main">
-  <p:cSld>
-    <p:spTree>
-      <p:nvGrpSpPr>
-        <p:cNvPr id="1" name=""/>
-        <p:cNvGrpSpPr/>
-        <p:nvPr/>
-      </p:nvGrpSpPr>
-      <p:grpSpPr>
-        <a:xfrm>
-          <a:off x="0" y="0"/>
-          <a:ext cx="0" cy="0"/>
-          <a:chOff x="0" y="0"/>
-          <a:chExt cx="0" cy="0"/>
-        </a:xfrm>
-      </p:grpSpPr>
-      <p:pic>
-        <p:nvPicPr>
-          <p:cNvPr id="2" name="Picture 1">
-            <a:extLst>
-              <a:ext uri="{FF2B5EF4-FFF2-40B4-BE49-F238E27FC236}">
-                <a16:creationId xmlns:a16="http://schemas.microsoft.com/office/drawing/2014/main" id="{BD741F70-5C03-C544-670B-E915E49F39E4}"/>
-              </a:ext>
-            </a:extLst>
-          </p:cNvPr>
-          <p:cNvPicPr>
-            <a:picLocks noChangeAspect="1"/>
-          </p:cNvPicPr>
-          <p:nvPr/>
-        </p:nvPicPr>
-        <p:blipFill rotWithShape="1">
-          <a:blip r:embed="rId2"/>
-          <a:srcRect l="18040" t="15174" r="17378" b="16187"/>
-          <a:stretch/>
-        </p:blipFill>
-        <p:spPr>
-          <a:xfrm>
-            <a:off x="11352346" y="100154"/>
-            <a:ext cx="642077" cy="682387"/>
-          </a:xfrm>
-          <a:prstGeom prst="rect">
-            <a:avLst/>
-          </a:prstGeom>
-        </p:spPr>
-      </p:pic>
-      <p:grpSp>
-        <p:nvGrpSpPr>
-          <p:cNvPr id="5" name="Group 4">
-            <a:extLst>
-              <a:ext uri="{FF2B5EF4-FFF2-40B4-BE49-F238E27FC236}">
-                <a16:creationId xmlns:a16="http://schemas.microsoft.com/office/drawing/2014/main" id="{0A41F1D5-4CD2-30F6-5607-C3927C188F55}"/>
-              </a:ext>
-            </a:extLst>
-          </p:cNvPr>
-          <p:cNvGrpSpPr/>
-          <p:nvPr/>
-        </p:nvGrpSpPr>
-        <p:grpSpPr>
-          <a:xfrm>
-            <a:off x="2438400" y="782541"/>
-            <a:ext cx="9753600" cy="6075458"/>
-            <a:chOff x="2438400" y="782541"/>
-            <a:chExt cx="9753600" cy="6075458"/>
-          </a:xfrm>
-        </p:grpSpPr>
-        <p:pic>
-          <p:nvPicPr>
-            <p:cNvPr id="3" name="Picture 2">
-              <a:extLst>
-                <a:ext uri="{FF2B5EF4-FFF2-40B4-BE49-F238E27FC236}">
-                  <a16:creationId xmlns:a16="http://schemas.microsoft.com/office/drawing/2014/main" id="{8BB81B18-F3C0-3D20-CE66-A84F773989D5}"/>
-                </a:ext>
-              </a:extLst>
-            </p:cNvPr>
-            <p:cNvPicPr>
-              <a:picLocks noChangeAspect="1"/>
-            </p:cNvPicPr>
-            <p:nvPr/>
-          </p:nvPicPr>
-          <p:blipFill>
-            <a:blip r:embed="rId3"/>
-            <a:stretch>
-              <a:fillRect/>
-            </a:stretch>
-          </p:blipFill>
-          <p:spPr>
-            <a:xfrm>
-              <a:off x="2438400" y="782541"/>
-              <a:ext cx="9753600" cy="5808474"/>
-            </a:xfrm>
-            <a:prstGeom prst="rect">
-              <a:avLst/>
-            </a:prstGeom>
-          </p:spPr>
-        </p:pic>
-        <p:sp>
-          <p:nvSpPr>
-            <p:cNvPr id="4" name="Rectangle 3">
-              <a:extLst>
-                <a:ext uri="{FF2B5EF4-FFF2-40B4-BE49-F238E27FC236}">
-                  <a16:creationId xmlns:a16="http://schemas.microsoft.com/office/drawing/2014/main" id="{C9E828F2-2862-DCDE-80CE-F6FEFDBC98CB}"/>
-                </a:ext>
-              </a:extLst>
-            </p:cNvPr>
-            <p:cNvSpPr/>
-            <p:nvPr/>
-          </p:nvSpPr>
-          <p:spPr>
-            <a:xfrm>
-              <a:off x="8461612" y="6075458"/>
-              <a:ext cx="3730388" cy="782541"/>
-            </a:xfrm>
-            <a:prstGeom prst="rect">
-              <a:avLst/>
-            </a:prstGeom>
-            <a:noFill/>
-            <a:ln>
-              <a:noFill/>
-            </a:ln>
-          </p:spPr>
-          <p:style>
-            <a:lnRef idx="2">
-              <a:schemeClr val="accent1">
-                <a:shade val="50000"/>
-              </a:schemeClr>
-            </a:lnRef>
-            <a:fillRef idx="1">
-              <a:schemeClr val="accent1"/>
-            </a:fillRef>
-            <a:effectRef idx="0">
-              <a:schemeClr val="accent1"/>
-            </a:effectRef>
-            <a:fontRef idx="minor">
-              <a:schemeClr val="lt1"/>
-            </a:fontRef>
-          </p:style>
-          <p:txBody>
-            <a:bodyPr rtlCol="0" anchor="ctr"/>
-            <a:lstStyle/>
-            <a:p>
-              <a:r>
-                <a:rPr lang="en-IN" sz="3200" b="1" dirty="0">
-                  <a:solidFill>
-                    <a:schemeClr val="accent1">
-                      <a:lumMod val="50000"/>
-                    </a:schemeClr>
-                  </a:solidFill>
-                </a:rPr>
-                <a:t>-by Dibyendu Biswas</a:t>
-              </a:r>
-            </a:p>
-          </p:txBody>
-        </p:sp>
-      </p:grpSp>
-    </p:spTree>
-    <p:extLst>
-      <p:ext uri="{BB962C8B-B14F-4D97-AF65-F5344CB8AC3E}">
-        <p14:creationId xmlns:p14="http://schemas.microsoft.com/office/powerpoint/2010/main" val="2149262193"/>
       </p:ext>
     </p:extLst>
   </p:cSld>
